--- a/downloads/DCT_V2_Ch14_Slides.pptx
+++ b/downloads/DCT_V2_Ch14_Slides.pptx
@@ -28,9 +28,10 @@
     <p:sldId id="276" r:id="rId22"/>
     <p:sldId id="277" r:id="rId23"/>
     <p:sldId id="278" r:id="rId24"/>
+    <p:sldId id="279" r:id="rId25"/>
   </p:sldIdLst>
   <p:notesMasterIdLst>
-    <p:notesMasterId r:id="rId25"/>
+    <p:notesMasterId r:id="rId26"/>
   </p:notesMasterIdLst>
   <p:sldSz cx="12192000" cy="6858000"/>
   <p:notesSz cx="6858000" cy="12192000"/>
@@ -129,7 +130,7 @@
   <p:extLst>
     <p:ext uri="{521415D9-36F7-43E2-AB2F-B90AF26B5E84}">
       <p14:sectionLst xmlns:p14="http://schemas.microsoft.com/office/powerpoint/2010/main">
-        <p14:section name="Opening" id="{d5ab994a-26ce-1b8f-b43e-5447d1638129}">
+        <p14:section name="Opening" id="{47fd6c4d-3570-ee5b-9f6e-f8b520b0b2f7}">
           <p14:sldIdLst>
             <p14:sldId id="256"/>
             <p14:sldId id="257"/>
@@ -137,38 +138,38 @@
             <p14:sldId id="259"/>
           </p14:sldIdLst>
         </p14:section>
-        <p14:section name="14.1 Learning from Acting" id="{2fca0353-cfc5-87d0-978b-1dd5ccb549c0}">
+        <p14:section name="14.1 Learning from Acting" id="{826682ee-ea75-28d3-869e-018d1acc884a}">
           <p14:sldIdLst>
             <p14:sldId id="260"/>
             <p14:sldId id="261"/>
           </p14:sldIdLst>
         </p14:section>
-        <p14:section name="14.2 Learning a Rule by Trial" id="{033ec7e0-c0e2-5b4f-94e9-ba22f813427e}">
+        <p14:section name="14.2 Learning a Rule by Trial" id="{3c880285-5b39-6081-d420-bfc0ce0249a8}">
           <p14:sldIdLst>
             <p14:sldId id="262"/>
             <p14:sldId id="263"/>
             <p14:sldId id="264"/>
           </p14:sldIdLst>
         </p14:section>
-        <p14:section name="14.3 The Price of Exploration" id="{4fe57c14-4190-20e7-b6cb-2172f9d85999}">
+        <p14:section name="14.3 The Price of Exploration" id="{5feaf908-32ff-652f-7599-3165f960e939}">
           <p14:sldIdLst>
             <p14:sldId id="265"/>
             <p14:sldId id="266"/>
           </p14:sldIdLst>
         </p14:section>
-        <p14:section name="14.4 Learning with a Simulator" id="{6528f4ef-56dc-64b9-3f88-2025b0383830}">
+        <p14:section name="14.4 Learning with a Simulator" id="{de668750-1420-71f6-5376-30b3ec29a4c8}">
           <p14:sldIdLst>
             <p14:sldId id="267"/>
             <p14:sldId id="268"/>
           </p14:sldIdLst>
         </p14:section>
-        <p14:section name="14.5 Keeping the Commitments" id="{0545fa47-5973-0dbb-c313-7a2133a5329d}">
+        <p14:section name="14.5 Keeping the Commitments" id="{38332649-119a-4ac4-76cf-0d100deed9bf}">
           <p14:sldIdLst>
             <p14:sldId id="269"/>
             <p14:sldId id="270"/>
           </p14:sldIdLst>
         </p14:section>
-        <p14:section name="Worked Example 14.1" id="{b4fcabee-793e-8d05-8660-02c0e4d1be27}">
+        <p14:section name="Worked Example 14.1" id="{a1aa7047-3582-cdbc-625a-aeb44fae13b5}">
           <p14:sldIdLst>
             <p14:sldId id="271"/>
             <p14:sldId id="272"/>
@@ -176,16 +177,21 @@
             <p14:sldId id="274"/>
           </p14:sldIdLst>
         </p14:section>
-        <p14:section name="AXIOM Lab 2.14" id="{729dd5b1-5c62-59a2-daf9-4039375376b6}">
+        <p14:section name="In Practice" id="{8aea38e2-d168-0a47-8b98-6b787786a4f5}">
           <p14:sldIdLst>
             <p14:sldId id="275"/>
           </p14:sldIdLst>
         </p14:section>
-        <p14:section name="Close" id="{799e08c9-64e7-f79b-36f4-d1aa277cc817}">
+        <p14:section name="AXIOM Lab 2.14" id="{783d03fd-5906-4562-41d9-1ffa6bc1d5c2}">
           <p14:sldIdLst>
             <p14:sldId id="276"/>
+          </p14:sldIdLst>
+        </p14:section>
+        <p14:section name="Close" id="{f47b4ec3-2d87-0077-8924-fdd60b8060c0}">
+          <p14:sldIdLst>
             <p14:sldId id="277"/>
             <p14:sldId id="278"/>
+            <p14:sldId id="279"/>
           </p14:sldIdLst>
         </p14:section>
       </p14:sectionLst>
@@ -1648,7 +1654,7 @@
           <a:p>
             <a:r>
               <a:rPr lang="en-US" dirty="0"/>
-              <a:t>AXIOM Lab 2.14. What to look for: slow convergence, and a rule good where the company goes while its values are wrong elsewhere (Theorem 14.1); greedy learners that stop exploring (Theorem 14.2(ii)); regret that grows like a logarithm for the optimistic rule (Theorem 14.2(iii)); a cheap simulator from the swings and a misleading one from practice (Theorem 14.3); and the guardrail's bound (Proposition 14.2(i)).</a:t>
+              <a:t>In Practice, Chapter 14: Google Hands Its Cooling to an Agent. A real organization's decision of this chapter's kind, told from its published record; every figure is cited in the book. The lesson for Meridian: A guardrail costs nothing when it holds the best decisions; the override is the escalation of Chapter 15. Sources: Gao (2014); Evans and Gao (2016); Gamble and Gao (2018); Lazic et al. (2018); Luo et al. (2022).</a:t>
             </a:r>
             <a:endParaRPr lang="en-US" dirty="0"/>
           </a:p>
@@ -1736,7 +1742,7 @@
           <a:p>
             <a:r>
               <a:rPr lang="en-US" dirty="0"/>
-              <a:t>Key Takeaways, Chapter 14.</a:t>
+              <a:t>AXIOM Lab 2.14. What to look for: slow convergence, and a rule good where the company goes while its values are wrong elsewhere (Theorem 14.1); greedy learners that stop exploring (Theorem 14.2(ii)); regret that grows like a logarithm for the optimistic rule (Theorem 14.2(iii)); a cheap simulator from the swings and a misleading one from practice (Theorem 14.3); and the guardrail's bound (Proposition 14.2(i)).</a:t>
             </a:r>
             <a:endParaRPr lang="en-US" dirty="0"/>
           </a:p>
@@ -1824,7 +1830,7 @@
           <a:p>
             <a:r>
               <a:rPr lang="en-US" dirty="0"/>
-              <a:t>The notebook and workbook are on the course website, www.dynamiccorporatetransformation.com.</a:t>
+              <a:t>Key Takeaways, Chapter 14.</a:t>
             </a:r>
             <a:endParaRPr lang="en-US" dirty="0"/>
           </a:p>
@@ -1912,7 +1918,7 @@
           <a:p>
             <a:r>
               <a:rPr lang="en-US" dirty="0"/>
-              <a:t>The inequality is the certificate of Proposition 14.2(ii): values whose largest Bellman residual is e lie within e/(1 − β) of the best values (Theorem 7.3(ii)). Chapter 15, Enterprise Digital Twins and Autonomous Enterprise Transformation, is the next chapter of Part IV, Multi-Objective and Intelligent Enterprise Optimization.</a:t>
+              <a:t>The notebook and workbook are on the course website, www.dynamiccorporatetransformation.com.</a:t>
             </a:r>
             <a:endParaRPr lang="en-US" dirty="0"/>
           </a:p>
@@ -1936,6 +1942,94 @@
             <a:fld id="{F7021451-1387-4CA6-816F-3879F97B5CBC}" type="slidenum">
               <a:rPr lang="en-US"/>
               <a:t>23</a:t>
+            </a:fld>
+            <a:endParaRPr lang="en-US"/>
+          </a:p>
+        </p:txBody>
+      </p:sp>
+    </p:spTree>
+    <p:extLst>
+      <p:ext uri="{BB962C8B-B14F-4D97-AF65-F5344CB8AC3E}">
+        <p14:creationId xmlns:p14="http://schemas.microsoft.com/office/powerpoint/2010/main" val="1024086991"/>
+      </p:ext>
+    </p:extLst>
+  </p:cSld>
+  <p:clrMapOvr>
+    <a:masterClrMapping/>
+  </p:clrMapOvr>
+</p:notes>
+</file>
+
+<file path=ppt/notesSlides/notesSlide24.xml><?xml version="1.0" encoding="utf-8"?>
+<p:notes xmlns:a="http://schemas.openxmlformats.org/drawingml/2006/main" xmlns:r="http://schemas.openxmlformats.org/officeDocument/2006/relationships" xmlns:p="http://schemas.openxmlformats.org/presentationml/2006/main">
+  <p:cSld>
+    <p:spTree>
+      <p:nvGrpSpPr>
+        <p:cNvPr id="1" name=""/>
+        <p:cNvGrpSpPr/>
+        <p:nvPr/>
+      </p:nvGrpSpPr>
+      <p:grpSpPr>
+        <a:xfrm>
+          <a:off x="0" y="0"/>
+          <a:ext cx="0" cy="0"/>
+          <a:chOff x="0" y="0"/>
+          <a:chExt cx="0" cy="0"/>
+        </a:xfrm>
+      </p:grpSpPr>
+      <p:sp>
+        <p:nvSpPr>
+          <p:cNvPr id="2" name="Slide Image Placeholder 1"/>
+          <p:cNvSpPr>
+            <a:spLocks noGrp="1" noRot="1" noChangeAspect="1"/>
+          </p:cNvSpPr>
+          <p:nvPr>
+            <p:ph type="sldImg"/>
+          </p:nvPr>
+        </p:nvSpPr>
+        <p:spPr/>
+      </p:sp>
+      <p:sp>
+        <p:nvSpPr>
+          <p:cNvPr id="3" name="Notes Placeholder 2"/>
+          <p:cNvSpPr>
+            <a:spLocks noGrp="1"/>
+          </p:cNvSpPr>
+          <p:nvPr>
+            <p:ph type="body" idx="1"/>
+          </p:nvPr>
+        </p:nvSpPr>
+        <p:spPr/>
+        <p:txBody>
+          <a:bodyPr/>
+          <a:lstStyle/>
+          <a:p>
+            <a:r>
+              <a:rPr lang="en-US" dirty="0"/>
+              <a:t>The inequality is the certificate of Proposition 14.2(ii): values whose largest Bellman residual is e lie within e/(1 − β) of the best values (Theorem 7.3(ii)). Chapter 15, Enterprise Digital Twins and Autonomous Enterprise Transformation, is the next chapter of Part IV, Multi-Objective and Intelligent Enterprise Optimization.</a:t>
+            </a:r>
+            <a:endParaRPr lang="en-US" dirty="0"/>
+          </a:p>
+        </p:txBody>
+      </p:sp>
+      <p:sp>
+        <p:nvSpPr>
+          <p:cNvPr id="4" name="Slide Number Placeholder 3"/>
+          <p:cNvSpPr>
+            <a:spLocks noGrp="1"/>
+          </p:cNvSpPr>
+          <p:nvPr>
+            <p:ph type="sldNum" sz="quarter" idx="10"/>
+          </p:nvPr>
+        </p:nvSpPr>
+        <p:spPr/>
+        <p:txBody>
+          <a:bodyPr/>
+          <a:lstStyle/>
+          <a:p>
+            <a:fld id="{F7021451-1387-4CA6-816F-3879F97B5CBC}" type="slidenum">
+              <a:rPr lang="en-US"/>
+              <a:t>24</a:t>
             </a:fld>
             <a:endParaRPr lang="en-US"/>
           </a:p>
@@ -14360,7 +14454,7 @@
                   <a:schemeClr val="accent1"/>
                 </a:solidFill>
               </a:rPr>
-              <a:t>AXIOM LAB 2.14 · MODULE AXIOM-14</a:t>
+              <a:t>IN PRACTICE · GOOGLE</a:t>
             </a:r>
             <a:endParaRPr lang="en-US" sz="1200" dirty="0"/>
           </a:p>
@@ -14401,804 +14495,26 @@
                 <a:ea typeface="Cambria" pitchFamily="34" charset="-122"/>
                 <a:cs typeface="Cambria" pitchFamily="34" charset="-120"/>
               </a:rPr>
-              <a:t>Learning a rule by trial, in AXIOM</a:t>
+              <a:t>Google hands its cooling to an agent</a:t>
             </a:r>
             <a:endParaRPr lang="en-US" sz="3200" dirty="0"/>
           </a:p>
         </p:txBody>
       </p:sp>
-      <p:pic>
-        <p:nvPicPr>
-          <p:cNvPr id="5" name="AXIOM logo" descr="AXIOM">    </p:cNvPr>
-          <p:cNvPicPr>
-            <a:picLocks noChangeAspect="1"/>
-          </p:cNvPicPr>
-          <p:nvPr/>
-        </p:nvPicPr>
-        <p:blipFill>
-          <a:blip r:embed="rId1"/>
-          <a:stretch>
-            <a:fillRect/>
-          </a:stretch>
-        </p:blipFill>
-        <p:spPr>
-          <a:xfrm>
-            <a:off x="9539935" y="310896"/>
-            <a:ext cx="2103120" cy="420624"/>
-          </a:xfrm>
-          <a:prstGeom prst="rect">
-            <a:avLst/>
-          </a:prstGeom>
-        </p:spPr>
-      </p:pic>
-      <p:sp>
-        <p:nvSpPr>
-          <p:cNvPr id="6" name="Situation"/>
-          <p:cNvSpPr txBox="1"/>
-          <p:nvPr/>
-        </p:nvSpPr>
-        <p:spPr>
-          <a:xfrm>
-            <a:off x="548640" y="1645920"/>
-            <a:ext cx="11094415" cy="777240"/>
-          </a:xfrm>
-          <a:prstGeom prst="rect">
-            <a:avLst/>
-          </a:prstGeom>
-          <a:noFill/>
-          <a:ln/>
-        </p:spPr>
-        <p:txBody>
-          <a:bodyPr wrap="square" lIns="0" tIns="0" rIns="0" bIns="0" rtlCol="0" anchor="t"/>
-          <a:lstStyle/>
-          <a:p>
-            <a:pPr indent="0" marL="0">
-              <a:buNone/>
-            </a:pPr>
-            <a:r>
-              <a:rPr lang="en-US" sz="1500" dirty="0">
-                <a:solidFill>
-                  <a:schemeClr val="tx1"/>
-                </a:solidFill>
-              </a:rPr>
-              <a:t>Digital Solutions' AI team proposes an agent that learns Meridian's hiring rule by acting. The chief human resources officer and the audit committee must decide whether, where, and within what limits it may learn. Open AXIOM, choose Lab 2.14 and load the Meridian hiring instance.</a:t>
-            </a:r>
-            <a:endParaRPr lang="en-US" sz="1500" dirty="0"/>
-          </a:p>
-        </p:txBody>
-      </p:sp>
-      <p:sp>
-        <p:nvSpPr>
-          <p:cNvPr id="7" name="Flow line"/>
+      <p:sp>
+        <p:nvSpPr>
+          <p:cNvPr id="5" name="Card"/>
           <p:cNvSpPr/>
           <p:nvPr/>
         </p:nvSpPr>
         <p:spPr>
           <a:xfrm>
-            <a:off x="1658082" y="2880360"/>
-            <a:ext cx="8875532" cy="0"/>
-          </a:xfrm>
-          <a:prstGeom prst="line">
-            <a:avLst/>
-          </a:prstGeom>
-          <a:noFill/>
-          <a:ln w="25400">
-            <a:solidFill>
-              <a:srgbClr val="C4CBD8"/>
-            </a:solidFill>
-            <a:prstDash val="solid"/>
-          </a:ln>
-        </p:spPr>
-      </p:sp>
-      <p:sp>
-        <p:nvSpPr>
-          <p:cNvPr id="8" name="Number"/>
-          <p:cNvSpPr/>
-          <p:nvPr/>
-        </p:nvSpPr>
-        <p:spPr>
-          <a:xfrm>
-            <a:off x="1383762" y="2606040"/>
-            <a:ext cx="548640" cy="548640"/>
-          </a:xfrm>
-          <a:prstGeom prst="ellipse">
-            <a:avLst/>
-          </a:prstGeom>
-          <a:solidFill>
-            <a:schemeClr val="accent1"/>
-          </a:solidFill>
-          <a:ln w="6350">
-            <a:solidFill>
-              <a:schemeClr val="accent1"/>
-            </a:solidFill>
-            <a:prstDash val="solid"/>
-          </a:ln>
-        </p:spPr>
-      </p:sp>
-      <p:sp>
-        <p:nvSpPr>
-          <p:cNvPr id="9" name="Text 5"/>
-          <p:cNvSpPr txBox="1"/>
-          <p:nvPr/>
-        </p:nvSpPr>
-        <p:spPr>
-          <a:xfrm>
-            <a:off x="1383762" y="2606040"/>
-            <a:ext cx="548640" cy="548640"/>
-          </a:xfrm>
-          <a:prstGeom prst="rect">
-            <a:avLst/>
-          </a:prstGeom>
-          <a:noFill/>
-          <a:ln/>
-        </p:spPr>
-        <p:txBody>
-          <a:bodyPr wrap="square" lIns="0" tIns="0" rIns="0" bIns="0" rtlCol="0" anchor="ctr"/>
-          <a:lstStyle/>
-          <a:p>
-            <a:pPr algn="ctr" indent="0" marL="0">
-              <a:buNone/>
-            </a:pPr>
-            <a:r>
-              <a:rPr lang="en-US" sz="1600" b="1" dirty="0">
-                <a:solidFill>
-                  <a:schemeClr val="bg1"/>
-                </a:solidFill>
-                <a:latin typeface="Calibri" pitchFamily="34" charset="0"/>
-                <a:ea typeface="Calibri" pitchFamily="34" charset="-122"/>
-                <a:cs typeface="Calibri" pitchFamily="34" charset="-120"/>
-              </a:rPr>
-              <a:t>1</a:t>
-            </a:r>
-            <a:endParaRPr lang="en-US" sz="1600" dirty="0"/>
-          </a:p>
-        </p:txBody>
-      </p:sp>
-      <p:sp>
-        <p:nvSpPr>
-          <p:cNvPr id="10" name="Flow head"/>
-          <p:cNvSpPr txBox="1"/>
-          <p:nvPr/>
-        </p:nvSpPr>
-        <p:spPr>
-          <a:xfrm>
-            <a:off x="621792" y="3291840"/>
-            <a:ext cx="2072579" cy="548640"/>
-          </a:xfrm>
-          <a:prstGeom prst="rect">
-            <a:avLst/>
-          </a:prstGeom>
-          <a:noFill/>
-          <a:ln/>
-        </p:spPr>
-        <p:txBody>
-          <a:bodyPr wrap="square" lIns="0" tIns="0" rIns="0" bIns="0" rtlCol="0" anchor="t"/>
-          <a:lstStyle/>
-          <a:p>
-            <a:pPr algn="ctr" indent="0" marL="0">
-              <a:buNone/>
-            </a:pPr>
-            <a:r>
-              <a:rPr lang="en-US" sz="1600" b="1" dirty="0">
-                <a:solidFill>
-                  <a:schemeClr val="tx1"/>
-                </a:solidFill>
-                <a:latin typeface="Cambria" pitchFamily="34" charset="0"/>
-                <a:ea typeface="Cambria" pitchFamily="34" charset="-122"/>
-                <a:cs typeface="Cambria" pitchFamily="34" charset="-120"/>
-              </a:rPr>
-              <a:t>Benchmark</a:t>
-            </a:r>
-            <a:endParaRPr lang="en-US" sz="1600" dirty="0"/>
-          </a:p>
-        </p:txBody>
-      </p:sp>
-      <p:sp>
-        <p:nvSpPr>
-          <p:cNvPr id="11" name="Flow text"/>
-          <p:cNvSpPr txBox="1"/>
-          <p:nvPr/>
-        </p:nvSpPr>
-        <p:spPr>
-          <a:xfrm>
-            <a:off x="640080" y="3867912"/>
-            <a:ext cx="2036003" cy="1554480"/>
-          </a:xfrm>
-          <a:prstGeom prst="rect">
-            <a:avLst/>
-          </a:prstGeom>
-          <a:noFill/>
-          <a:ln/>
-        </p:spPr>
-        <p:txBody>
-          <a:bodyPr wrap="square" lIns="0" tIns="0" rIns="0" bIns="0" rtlCol="0" anchor="t"/>
-          <a:lstStyle/>
-          <a:p>
-            <a:pPr algn="ctr" indent="0" marL="0">
-              <a:buNone/>
-            </a:pPr>
-            <a:r>
-              <a:rPr lang="en-US" sz="1400" dirty="0">
-                <a:solidFill>
-                  <a:schemeClr val="tx2"/>
-                </a:solidFill>
-              </a:rPr>
-              <a:t>Solve the declared program by policy iteration: the best rule, its cost, the guardrail.</a:t>
-            </a:r>
-            <a:endParaRPr lang="en-US" sz="1400" dirty="0"/>
-          </a:p>
-        </p:txBody>
-      </p:sp>
-      <p:sp>
-        <p:nvSpPr>
-          <p:cNvPr id="12" name="Number"/>
-          <p:cNvSpPr/>
-          <p:nvPr/>
-        </p:nvSpPr>
-        <p:spPr>
-          <a:xfrm>
-            <a:off x="3602645" y="2606040"/>
-            <a:ext cx="548640" cy="548640"/>
-          </a:xfrm>
-          <a:prstGeom prst="ellipse">
-            <a:avLst/>
-          </a:prstGeom>
-          <a:solidFill>
-            <a:schemeClr val="accent1"/>
-          </a:solidFill>
-          <a:ln w="6350">
-            <a:solidFill>
-              <a:schemeClr val="accent1"/>
-            </a:solidFill>
-            <a:prstDash val="solid"/>
-          </a:ln>
-        </p:spPr>
-      </p:sp>
-      <p:sp>
-        <p:nvSpPr>
-          <p:cNvPr id="13" name="Text 9"/>
-          <p:cNvSpPr txBox="1"/>
-          <p:nvPr/>
-        </p:nvSpPr>
-        <p:spPr>
-          <a:xfrm>
-            <a:off x="3602645" y="2606040"/>
-            <a:ext cx="548640" cy="548640"/>
-          </a:xfrm>
-          <a:prstGeom prst="rect">
-            <a:avLst/>
-          </a:prstGeom>
-          <a:noFill/>
-          <a:ln/>
-        </p:spPr>
-        <p:txBody>
-          <a:bodyPr wrap="square" lIns="0" tIns="0" rIns="0" bIns="0" rtlCol="0" anchor="ctr"/>
-          <a:lstStyle/>
-          <a:p>
-            <a:pPr algn="ctr" indent="0" marL="0">
-              <a:buNone/>
-            </a:pPr>
-            <a:r>
-              <a:rPr lang="en-US" sz="1600" b="1" dirty="0">
-                <a:solidFill>
-                  <a:schemeClr val="bg1"/>
-                </a:solidFill>
-                <a:latin typeface="Calibri" pitchFamily="34" charset="0"/>
-                <a:ea typeface="Calibri" pitchFamily="34" charset="-122"/>
-                <a:cs typeface="Calibri" pitchFamily="34" charset="-120"/>
-              </a:rPr>
-              <a:t>2</a:t>
-            </a:r>
-            <a:endParaRPr lang="en-US" sz="1600" dirty="0"/>
-          </a:p>
-        </p:txBody>
-      </p:sp>
-      <p:sp>
-        <p:nvSpPr>
-          <p:cNvPr id="14" name="Flow head"/>
-          <p:cNvSpPr txBox="1"/>
-          <p:nvPr/>
-        </p:nvSpPr>
-        <p:spPr>
-          <a:xfrm>
-            <a:off x="2840675" y="3291840"/>
-            <a:ext cx="2072579" cy="548640"/>
-          </a:xfrm>
-          <a:prstGeom prst="rect">
-            <a:avLst/>
-          </a:prstGeom>
-          <a:noFill/>
-          <a:ln/>
-        </p:spPr>
-        <p:txBody>
-          <a:bodyPr wrap="square" lIns="0" tIns="0" rIns="0" bIns="0" rtlCol="0" anchor="t"/>
-          <a:lstStyle/>
-          <a:p>
-            <a:pPr algn="ctr" indent="0" marL="0">
-              <a:buNone/>
-            </a:pPr>
-            <a:r>
-              <a:rPr lang="en-US" sz="1600" b="1" dirty="0">
-                <a:solidFill>
-                  <a:schemeClr val="tx1"/>
-                </a:solidFill>
-                <a:latin typeface="Cambria" pitchFamily="34" charset="0"/>
-                <a:ea typeface="Cambria" pitchFamily="34" charset="-122"/>
-                <a:cs typeface="Cambria" pitchFamily="34" charset="-120"/>
-              </a:rPr>
-              <a:t>Train by trial</a:t>
-            </a:r>
-            <a:endParaRPr lang="en-US" sz="1600" dirty="0"/>
-          </a:p>
-        </p:txBody>
-      </p:sp>
-      <p:sp>
-        <p:nvSpPr>
-          <p:cNvPr id="15" name="Flow text"/>
-          <p:cNvSpPr txBox="1"/>
-          <p:nvPr/>
-        </p:nvSpPr>
-        <p:spPr>
-          <a:xfrm>
-            <a:off x="2858963" y="3867912"/>
-            <a:ext cx="2036003" cy="1554480"/>
-          </a:xfrm>
-          <a:prstGeom prst="rect">
-            <a:avLst/>
-          </a:prstGeom>
-          <a:noFill/>
-          <a:ln/>
-        </p:spPr>
-        <p:txBody>
-          <a:bodyPr wrap="square" lIns="0" tIns="0" rIns="0" bIns="0" rtlCol="0" anchor="t"/>
-          <a:lstStyle/>
-          <a:p>
-            <a:pPr algn="ctr" indent="0" marL="0">
-              <a:buNone/>
-            </a:pPr>
-            <a:r>
-              <a:rPr lang="en-US" sz="1400" dirty="0">
-                <a:solidFill>
-                  <a:schemeClr val="tx2"/>
-                </a:solidFill>
-              </a:rPr>
-              <a:t>Q-learning in the simulator to a million quarters with several step sizes; price each rule.</a:t>
-            </a:r>
-            <a:endParaRPr lang="en-US" sz="1400" dirty="0"/>
-          </a:p>
-        </p:txBody>
-      </p:sp>
-      <p:sp>
-        <p:nvSpPr>
-          <p:cNvPr id="16" name="Number"/>
-          <p:cNvSpPr/>
-          <p:nvPr/>
-        </p:nvSpPr>
-        <p:spPr>
-          <a:xfrm>
-            <a:off x="5821528" y="2606040"/>
-            <a:ext cx="548640" cy="548640"/>
-          </a:xfrm>
-          <a:prstGeom prst="ellipse">
-            <a:avLst/>
-          </a:prstGeom>
-          <a:solidFill>
-            <a:schemeClr val="accent1"/>
-          </a:solidFill>
-          <a:ln w="6350">
-            <a:solidFill>
-              <a:schemeClr val="accent1"/>
-            </a:solidFill>
-            <a:prstDash val="solid"/>
-          </a:ln>
-        </p:spPr>
-      </p:sp>
-      <p:sp>
-        <p:nvSpPr>
-          <p:cNvPr id="17" name="Text 13"/>
-          <p:cNvSpPr txBox="1"/>
-          <p:nvPr/>
-        </p:nvSpPr>
-        <p:spPr>
-          <a:xfrm>
-            <a:off x="5821528" y="2606040"/>
-            <a:ext cx="548640" cy="548640"/>
-          </a:xfrm>
-          <a:prstGeom prst="rect">
-            <a:avLst/>
-          </a:prstGeom>
-          <a:noFill/>
-          <a:ln/>
-        </p:spPr>
-        <p:txBody>
-          <a:bodyPr wrap="square" lIns="0" tIns="0" rIns="0" bIns="0" rtlCol="0" anchor="ctr"/>
-          <a:lstStyle/>
-          <a:p>
-            <a:pPr algn="ctr" indent="0" marL="0">
-              <a:buNone/>
-            </a:pPr>
-            <a:r>
-              <a:rPr lang="en-US" sz="1600" b="1" dirty="0">
-                <a:solidFill>
-                  <a:schemeClr val="bg1"/>
-                </a:solidFill>
-                <a:latin typeface="Calibri" pitchFamily="34" charset="0"/>
-                <a:ea typeface="Calibri" pitchFamily="34" charset="-122"/>
-                <a:cs typeface="Calibri" pitchFamily="34" charset="-120"/>
-              </a:rPr>
-              <a:t>3</a:t>
-            </a:r>
-            <a:endParaRPr lang="en-US" sz="1600" dirty="0"/>
-          </a:p>
-        </p:txBody>
-      </p:sp>
-      <p:sp>
-        <p:nvSpPr>
-          <p:cNvPr id="18" name="Flow head"/>
-          <p:cNvSpPr txBox="1"/>
-          <p:nvPr/>
-        </p:nvSpPr>
-        <p:spPr>
-          <a:xfrm>
-            <a:off x="5059558" y="3291840"/>
-            <a:ext cx="2072579" cy="548640"/>
-          </a:xfrm>
-          <a:prstGeom prst="rect">
-            <a:avLst/>
-          </a:prstGeom>
-          <a:noFill/>
-          <a:ln/>
-        </p:spPr>
-        <p:txBody>
-          <a:bodyPr wrap="square" lIns="0" tIns="0" rIns="0" bIns="0" rtlCol="0" anchor="t"/>
-          <a:lstStyle/>
-          <a:p>
-            <a:pPr algn="ctr" indent="0" marL="0">
-              <a:buNone/>
-            </a:pPr>
-            <a:r>
-              <a:rPr lang="en-US" sz="1600" b="1" dirty="0">
-                <a:solidFill>
-                  <a:schemeClr val="tx1"/>
-                </a:solidFill>
-                <a:latin typeface="Cambria" pitchFamily="34" charset="0"/>
-                <a:ea typeface="Cambria" pitchFamily="34" charset="-122"/>
-                <a:cs typeface="Cambria" pitchFamily="34" charset="-120"/>
-              </a:rPr>
-              <a:t>Price exploration</a:t>
-            </a:r>
-            <a:endParaRPr lang="en-US" sz="1600" dirty="0"/>
-          </a:p>
-        </p:txBody>
-      </p:sp>
-      <p:sp>
-        <p:nvSpPr>
-          <p:cNvPr id="19" name="Flow text"/>
-          <p:cNvSpPr txBox="1"/>
-          <p:nvPr/>
-        </p:nvSpPr>
-        <p:spPr>
-          <a:xfrm>
-            <a:off x="5077846" y="3867912"/>
-            <a:ext cx="2036003" cy="1554480"/>
-          </a:xfrm>
-          <a:prstGeom prst="rect">
-            <a:avLst/>
-          </a:prstGeom>
-          <a:noFill/>
-          <a:ln/>
-        </p:spPr>
-        <p:txBody>
-          <a:bodyPr wrap="square" lIns="0" tIns="0" rIns="0" bIns="0" rtlCol="0" anchor="t"/>
-          <a:lstStyle/>
-          <a:p>
-            <a:pPr algn="ctr" indent="0" marL="0">
-              <a:buNone/>
-            </a:pPr>
-            <a:r>
-              <a:rPr lang="en-US" sz="1400" dirty="0">
-                <a:solidFill>
-                  <a:schemeClr val="tx2"/>
-                </a:solidFill>
-              </a:rPr>
-              <a:t>Greedy, randomized and optimistic choice among the target rules.</a:t>
-            </a:r>
-            <a:endParaRPr lang="en-US" sz="1400" dirty="0"/>
-          </a:p>
-        </p:txBody>
-      </p:sp>
-      <p:sp>
-        <p:nvSpPr>
-          <p:cNvPr id="20" name="Number"/>
-          <p:cNvSpPr/>
-          <p:nvPr/>
-        </p:nvSpPr>
-        <p:spPr>
-          <a:xfrm>
-            <a:off x="8040411" y="2606040"/>
-            <a:ext cx="548640" cy="548640"/>
-          </a:xfrm>
-          <a:prstGeom prst="ellipse">
-            <a:avLst/>
-          </a:prstGeom>
-          <a:solidFill>
-            <a:schemeClr val="accent1"/>
-          </a:solidFill>
-          <a:ln w="6350">
-            <a:solidFill>
-              <a:schemeClr val="accent1"/>
-            </a:solidFill>
-            <a:prstDash val="solid"/>
-          </a:ln>
-        </p:spPr>
-      </p:sp>
-      <p:sp>
-        <p:nvSpPr>
-          <p:cNvPr id="21" name="Text 17"/>
-          <p:cNvSpPr txBox="1"/>
-          <p:nvPr/>
-        </p:nvSpPr>
-        <p:spPr>
-          <a:xfrm>
-            <a:off x="8040411" y="2606040"/>
-            <a:ext cx="548640" cy="548640"/>
-          </a:xfrm>
-          <a:prstGeom prst="rect">
-            <a:avLst/>
-          </a:prstGeom>
-          <a:noFill/>
-          <a:ln/>
-        </p:spPr>
-        <p:txBody>
-          <a:bodyPr wrap="square" lIns="0" tIns="0" rIns="0" bIns="0" rtlCol="0" anchor="ctr"/>
-          <a:lstStyle/>
-          <a:p>
-            <a:pPr algn="ctr" indent="0" marL="0">
-              <a:buNone/>
-            </a:pPr>
-            <a:r>
-              <a:rPr lang="en-US" sz="1600" b="1" dirty="0">
-                <a:solidFill>
-                  <a:schemeClr val="bg1"/>
-                </a:solidFill>
-                <a:latin typeface="Calibri" pitchFamily="34" charset="0"/>
-                <a:ea typeface="Calibri" pitchFamily="34" charset="-122"/>
-                <a:cs typeface="Calibri" pitchFamily="34" charset="-120"/>
-              </a:rPr>
-              <a:t>4</a:t>
-            </a:r>
-            <a:endParaRPr lang="en-US" sz="1600" dirty="0"/>
-          </a:p>
-        </p:txBody>
-      </p:sp>
-      <p:sp>
-        <p:nvSpPr>
-          <p:cNvPr id="22" name="Flow head"/>
-          <p:cNvSpPr txBox="1"/>
-          <p:nvPr/>
-        </p:nvSpPr>
-        <p:spPr>
-          <a:xfrm>
-            <a:off x="7278441" y="3291840"/>
-            <a:ext cx="2072579" cy="548640"/>
-          </a:xfrm>
-          <a:prstGeom prst="rect">
-            <a:avLst/>
-          </a:prstGeom>
-          <a:noFill/>
-          <a:ln/>
-        </p:spPr>
-        <p:txBody>
-          <a:bodyPr wrap="square" lIns="0" tIns="0" rIns="0" bIns="0" rtlCol="0" anchor="t"/>
-          <a:lstStyle/>
-          <a:p>
-            <a:pPr algn="ctr" indent="0" marL="0">
-              <a:buNone/>
-            </a:pPr>
-            <a:r>
-              <a:rPr lang="en-US" sz="1600" b="1" dirty="0">
-                <a:solidFill>
-                  <a:schemeClr val="tx1"/>
-                </a:solidFill>
-                <a:latin typeface="Cambria" pitchFamily="34" charset="0"/>
-                <a:ea typeface="Cambria" pitchFamily="34" charset="-122"/>
-                <a:cs typeface="Cambria" pitchFamily="34" charset="-120"/>
-              </a:rPr>
-              <a:t>Learn a simulator</a:t>
-            </a:r>
-            <a:endParaRPr lang="en-US" sz="1600" dirty="0"/>
-          </a:p>
-        </p:txBody>
-      </p:sp>
-      <p:sp>
-        <p:nvSpPr>
-          <p:cNvPr id="23" name="Flow text"/>
-          <p:cNvSpPr txBox="1"/>
-          <p:nvPr/>
-        </p:nvSpPr>
-        <p:spPr>
-          <a:xfrm>
-            <a:off x="7296729" y="3867912"/>
-            <a:ext cx="2036003" cy="1554480"/>
-          </a:xfrm>
-          <a:prstGeom prst="rect">
-            <a:avLst/>
-          </a:prstGeom>
-          <a:noFill/>
-          <a:ln/>
-        </p:spPr>
-        <p:txBody>
-          <a:bodyPr wrap="square" lIns="0" tIns="0" rIns="0" bIns="0" rtlCol="0" anchor="t"/>
-          <a:lstStyle/>
-          <a:p>
-            <a:pPr algn="ctr" indent="0" marL="0">
-              <a:buNone/>
-            </a:pPr>
-            <a:r>
-              <a:rPr lang="en-US" sz="1400" dirty="0">
-                <a:solidFill>
-                  <a:schemeClr val="tx2"/>
-                </a:solidFill>
-              </a:rPr>
-              <a:t>Learn the swings from 12, 40 and 120 quarters; fit the dynamics to practice.</a:t>
-            </a:r>
-            <a:endParaRPr lang="en-US" sz="1400" dirty="0"/>
-          </a:p>
-        </p:txBody>
-      </p:sp>
-      <p:sp>
-        <p:nvSpPr>
-          <p:cNvPr id="24" name="Number"/>
-          <p:cNvSpPr/>
-          <p:nvPr/>
-        </p:nvSpPr>
-        <p:spPr>
-          <a:xfrm>
-            <a:off x="10259294" y="2606040"/>
-            <a:ext cx="548640" cy="548640"/>
-          </a:xfrm>
-          <a:prstGeom prst="ellipse">
-            <a:avLst/>
-          </a:prstGeom>
-          <a:solidFill>
-            <a:schemeClr val="accent1"/>
-          </a:solidFill>
-          <a:ln w="6350">
-            <a:solidFill>
-              <a:schemeClr val="accent1"/>
-            </a:solidFill>
-            <a:prstDash val="solid"/>
-          </a:ln>
-        </p:spPr>
-      </p:sp>
-      <p:sp>
-        <p:nvSpPr>
-          <p:cNvPr id="25" name="Text 21"/>
-          <p:cNvSpPr txBox="1"/>
-          <p:nvPr/>
-        </p:nvSpPr>
-        <p:spPr>
-          <a:xfrm>
-            <a:off x="10259294" y="2606040"/>
-            <a:ext cx="548640" cy="548640"/>
-          </a:xfrm>
-          <a:prstGeom prst="rect">
-            <a:avLst/>
-          </a:prstGeom>
-          <a:noFill/>
-          <a:ln/>
-        </p:spPr>
-        <p:txBody>
-          <a:bodyPr wrap="square" lIns="0" tIns="0" rIns="0" bIns="0" rtlCol="0" anchor="ctr"/>
-          <a:lstStyle/>
-          <a:p>
-            <a:pPr algn="ctr" indent="0" marL="0">
-              <a:buNone/>
-            </a:pPr>
-            <a:r>
-              <a:rPr lang="en-US" sz="1600" b="1" dirty="0">
-                <a:solidFill>
-                  <a:schemeClr val="bg1"/>
-                </a:solidFill>
-                <a:latin typeface="Calibri" pitchFamily="34" charset="0"/>
-                <a:ea typeface="Calibri" pitchFamily="34" charset="-122"/>
-                <a:cs typeface="Calibri" pitchFamily="34" charset="-120"/>
-              </a:rPr>
-              <a:t>5</a:t>
-            </a:r>
-            <a:endParaRPr lang="en-US" sz="1600" dirty="0"/>
-          </a:p>
-        </p:txBody>
-      </p:sp>
-      <p:sp>
-        <p:nvSpPr>
-          <p:cNvPr id="26" name="Flow head"/>
-          <p:cNvSpPr txBox="1"/>
-          <p:nvPr/>
-        </p:nvSpPr>
-        <p:spPr>
-          <a:xfrm>
-            <a:off x="9497324" y="3291840"/>
-            <a:ext cx="2072579" cy="548640"/>
-          </a:xfrm>
-          <a:prstGeom prst="rect">
-            <a:avLst/>
-          </a:prstGeom>
-          <a:noFill/>
-          <a:ln/>
-        </p:spPr>
-        <p:txBody>
-          <a:bodyPr wrap="square" lIns="0" tIns="0" rIns="0" bIns="0" rtlCol="0" anchor="t"/>
-          <a:lstStyle/>
-          <a:p>
-            <a:pPr algn="ctr" indent="0" marL="0">
-              <a:buNone/>
-            </a:pPr>
-            <a:r>
-              <a:rPr lang="en-US" sz="1600" b="1" dirty="0">
-                <a:solidFill>
-                  <a:schemeClr val="tx1"/>
-                </a:solidFill>
-                <a:latin typeface="Cambria" pitchFamily="34" charset="0"/>
-                <a:ea typeface="Cambria" pitchFamily="34" charset="-122"/>
-                <a:cs typeface="Cambria" pitchFamily="34" charset="-120"/>
-              </a:rPr>
-              <a:t>Learn on the company</a:t>
-            </a:r>
-            <a:endParaRPr lang="en-US" sz="1600" dirty="0"/>
-          </a:p>
-        </p:txBody>
-      </p:sp>
-      <p:sp>
-        <p:nvSpPr>
-          <p:cNvPr id="27" name="Flow text"/>
-          <p:cNvSpPr txBox="1"/>
-          <p:nvPr/>
-        </p:nvSpPr>
-        <p:spPr>
-          <a:xfrm>
-            <a:off x="9515612" y="3867912"/>
-            <a:ext cx="2036003" cy="1554480"/>
-          </a:xfrm>
-          <a:prstGeom prst="rect">
-            <a:avLst/>
-          </a:prstGeom>
-          <a:noFill/>
-          <a:ln/>
-        </p:spPr>
-        <p:txBody>
-          <a:bodyPr wrap="square" lIns="0" tIns="0" rIns="0" bIns="0" rtlCol="0" anchor="t"/>
-          <a:lstStyle/>
-          <a:p>
-            <a:pPr algn="ctr" indent="0" marL="0">
-              <a:buNone/>
-            </a:pPr>
-            <a:r>
-              <a:rPr lang="en-US" sz="1400" dirty="0">
-                <a:solidFill>
-                  <a:schemeClr val="tx2"/>
-                </a:solidFill>
-              </a:rPr>
-              <a:t>Forty quarters with and without the guardrail, against the worst rule inside it.</a:t>
-            </a:r>
-            <a:endParaRPr lang="en-US" sz="1400" dirty="0"/>
-          </a:p>
-        </p:txBody>
-      </p:sp>
-      <p:sp>
-        <p:nvSpPr>
-          <p:cNvPr id="28" name="Deliverable card"/>
-          <p:cNvSpPr/>
-          <p:nvPr/>
-        </p:nvSpPr>
-        <p:spPr>
-          <a:xfrm>
-            <a:off x="548640" y="5486400"/>
-            <a:ext cx="11094415" cy="685800"/>
+            <a:off x="548640" y="1691640"/>
+            <a:ext cx="3515258" cy="2103120"/>
           </a:xfrm>
           <a:prstGeom prst="roundRect">
             <a:avLst>
-              <a:gd name="adj" fmla="val 10667"/>
+              <a:gd name="adj" fmla="val 3478"/>
             </a:avLst>
           </a:prstGeom>
           <a:solidFill>
@@ -15214,14 +14530,14 @@
       </p:sp>
       <p:sp>
         <p:nvSpPr>
-          <p:cNvPr id="29" name="Deliverable"/>
+          <p:cNvPr id="6" name="Card label"/>
           <p:cNvSpPr txBox="1"/>
           <p:nvPr/>
         </p:nvSpPr>
         <p:spPr>
           <a:xfrm>
-            <a:off x="777240" y="5559552"/>
-            <a:ext cx="10637215" cy="539496"/>
+            <a:off x="731520" y="1819656"/>
+            <a:ext cx="3149498" cy="310896"/>
           </a:xfrm>
           <a:prstGeom prst="rect">
             <a:avLst/>
@@ -15237,22 +14553,779 @@
               <a:buNone/>
             </a:pPr>
             <a:r>
-              <a:rPr lang="en-US" sz="1400" b="1" dirty="0">
-                <a:solidFill>
-                  <a:schemeClr val="tx1"/>
-                </a:solidFill>
-              </a:rPr>
-              <a:t>Deliverable:</a:t>
-            </a:r>
-            <a:r>
-              <a:rPr lang="en-US" sz="1400" dirty="0">
-                <a:solidFill>
-                  <a:schemeClr val="tx1"/>
-                </a:solidFill>
-              </a:rPr>
-              <a:t> a one-page note to the board: whether and where the agent may learn, the guardrail and what it costs, the certificate the audit committee requires, and the records the engineering office should keep. About 75 minutes.</a:t>
-            </a:r>
-            <a:endParaRPr lang="en-US" sz="1400" dirty="0"/>
+              <a:rPr lang="en-US" sz="1300" b="1" dirty="0">
+                <a:solidFill>
+                  <a:schemeClr val="accent1"/>
+                </a:solidFill>
+              </a:rPr>
+              <a:t>The decision</a:t>
+            </a:r>
+            <a:endParaRPr lang="en-US" sz="1300" dirty="0"/>
+          </a:p>
+        </p:txBody>
+      </p:sp>
+      <p:sp>
+        <p:nvSpPr>
+          <p:cNvPr id="7" name="Card head"/>
+          <p:cNvSpPr txBox="1"/>
+          <p:nvPr/>
+        </p:nvSpPr>
+        <p:spPr>
+          <a:xfrm>
+            <a:off x="731520" y="2148840"/>
+            <a:ext cx="3149498" cy="576072"/>
+          </a:xfrm>
+          <a:prstGeom prst="rect">
+            <a:avLst/>
+          </a:prstGeom>
+          <a:noFill/>
+          <a:ln/>
+        </p:spPr>
+        <p:txBody>
+          <a:bodyPr wrap="square" lIns="0" tIns="0" rIns="0" bIns="0" rtlCol="0" anchor="t"/>
+          <a:lstStyle/>
+          <a:p>
+            <a:pPr indent="0" marL="0">
+              <a:buNone/>
+            </a:pPr>
+            <a:r>
+              <a:rPr lang="en-US" sz="1600" b="1" dirty="0">
+                <a:solidFill>
+                  <a:schemeClr val="tx1"/>
+                </a:solidFill>
+                <a:latin typeface="Cambria" pitchFamily="34" charset="0"/>
+                <a:ea typeface="Cambria" pitchFamily="34" charset="-122"/>
+                <a:cs typeface="Cambria" pitchFamily="34" charset="-120"/>
+              </a:rPr>
+              <a:t>Cooling settings, every five minutes</a:t>
+            </a:r>
+            <a:endParaRPr lang="en-US" sz="1600" dirty="0"/>
+          </a:p>
+        </p:txBody>
+      </p:sp>
+      <p:sp>
+        <p:nvSpPr>
+          <p:cNvPr id="8" name="Card text"/>
+          <p:cNvSpPr txBox="1"/>
+          <p:nvPr/>
+        </p:nvSpPr>
+        <p:spPr>
+          <a:xfrm>
+            <a:off x="731520" y="2798064"/>
+            <a:ext cx="3149498" cy="868680"/>
+          </a:xfrm>
+          <a:prstGeom prst="rect">
+            <a:avLst/>
+          </a:prstGeom>
+          <a:noFill/>
+          <a:ln/>
+        </p:spPr>
+        <p:txBody>
+          <a:bodyPr wrap="square" lIns="0" tIns="0" rIns="0" bIns="0" rtlCol="0" anchor="t"/>
+          <a:lstStyle/>
+          <a:p>
+            <a:pPr indent="0" marL="0">
+              <a:buNone/>
+            </a:pPr>
+            <a:r>
+              <a:rPr lang="en-US" sz="1300" dirty="0">
+                <a:solidFill>
+                  <a:schemeClr val="tx2"/>
+                </a:solidFill>
+              </a:rPr>
+              <a:t>Least energy within temperature and pressure limits, in plants that were already efficient.</a:t>
+            </a:r>
+            <a:endParaRPr lang="en-US" sz="1300" dirty="0"/>
+          </a:p>
+        </p:txBody>
+      </p:sp>
+      <p:sp>
+        <p:nvSpPr>
+          <p:cNvPr id="9" name="Card"/>
+          <p:cNvSpPr/>
+          <p:nvPr/>
+        </p:nvSpPr>
+        <p:spPr>
+          <a:xfrm>
+            <a:off x="4338218" y="1691640"/>
+            <a:ext cx="3515258" cy="2103120"/>
+          </a:xfrm>
+          <a:prstGeom prst="roundRect">
+            <a:avLst>
+              <a:gd name="adj" fmla="val 3478"/>
+            </a:avLst>
+          </a:prstGeom>
+          <a:solidFill>
+            <a:schemeClr val="bg2"/>
+          </a:solidFill>
+          <a:ln w="9525">
+            <a:solidFill>
+              <a:srgbClr val="C4CBD8"/>
+            </a:solidFill>
+            <a:prstDash val="solid"/>
+          </a:ln>
+        </p:spPr>
+      </p:sp>
+      <p:sp>
+        <p:nvSpPr>
+          <p:cNvPr id="10" name="Card label"/>
+          <p:cNvSpPr txBox="1"/>
+          <p:nvPr/>
+        </p:nvSpPr>
+        <p:spPr>
+          <a:xfrm>
+            <a:off x="4521098" y="1819656"/>
+            <a:ext cx="3149498" cy="310896"/>
+          </a:xfrm>
+          <a:prstGeom prst="rect">
+            <a:avLst/>
+          </a:prstGeom>
+          <a:noFill/>
+          <a:ln/>
+        </p:spPr>
+        <p:txBody>
+          <a:bodyPr wrap="square" lIns="0" tIns="0" rIns="0" bIns="0" rtlCol="0" anchor="ctr"/>
+          <a:lstStyle/>
+          <a:p>
+            <a:pPr indent="0" marL="0">
+              <a:buNone/>
+            </a:pPr>
+            <a:r>
+              <a:rPr lang="en-US" sz="1300" b="1" dirty="0">
+                <a:solidFill>
+                  <a:schemeClr val="accent1"/>
+                </a:solidFill>
+              </a:rPr>
+              <a:t>The method</a:t>
+            </a:r>
+            <a:endParaRPr lang="en-US" sz="1300" dirty="0"/>
+          </a:p>
+        </p:txBody>
+      </p:sp>
+      <p:sp>
+        <p:nvSpPr>
+          <p:cNvPr id="11" name="Card head"/>
+          <p:cNvSpPr txBox="1"/>
+          <p:nvPr/>
+        </p:nvSpPr>
+        <p:spPr>
+          <a:xfrm>
+            <a:off x="4521098" y="2148840"/>
+            <a:ext cx="3149498" cy="576072"/>
+          </a:xfrm>
+          <a:prstGeom prst="rect">
+            <a:avLst/>
+          </a:prstGeom>
+          <a:noFill/>
+          <a:ln/>
+        </p:spPr>
+        <p:txBody>
+          <a:bodyPr wrap="square" lIns="0" tIns="0" rIns="0" bIns="0" rtlCol="0" anchor="t"/>
+          <a:lstStyle/>
+          <a:p>
+            <a:pPr indent="0" marL="0">
+              <a:buNone/>
+            </a:pPr>
+            <a:r>
+              <a:rPr lang="en-US" sz="1600" b="1" dirty="0">
+                <a:solidFill>
+                  <a:schemeClr val="tx1"/>
+                </a:solidFill>
+                <a:latin typeface="Cambria" pitchFamily="34" charset="0"/>
+                <a:ea typeface="Cambria" pitchFamily="34" charset="-122"/>
+                <a:cs typeface="Cambria" pitchFamily="34" charset="-120"/>
+              </a:rPr>
+              <a:t>Learned models inside guardrails</a:t>
+            </a:r>
+            <a:endParaRPr lang="en-US" sz="1600" dirty="0"/>
+          </a:p>
+        </p:txBody>
+      </p:sp>
+      <p:sp>
+        <p:nvSpPr>
+          <p:cNvPr id="12" name="Card text"/>
+          <p:cNvSpPr txBox="1"/>
+          <p:nvPr/>
+        </p:nvSpPr>
+        <p:spPr>
+          <a:xfrm>
+            <a:off x="4521098" y="2798064"/>
+            <a:ext cx="3149498" cy="868680"/>
+          </a:xfrm>
+          <a:prstGeom prst="rect">
+            <a:avLst/>
+          </a:prstGeom>
+          <a:noFill/>
+          <a:ln/>
+        </p:spPr>
+        <p:txBody>
+          <a:bodyPr wrap="square" lIns="0" tIns="0" rIns="0" bIns="0" rtlCol="0" anchor="t"/>
+          <a:lstStyle/>
+          <a:p>
+            <a:pPr indent="0" marL="0">
+              <a:buNone/>
+            </a:pPr>
+            <a:r>
+              <a:rPr lang="en-US" sz="1300" dirty="0">
+                <a:solidFill>
+                  <a:schemeClr val="tx2"/>
+                </a:solidFill>
+              </a:rPr>
+              <a:t>Recommendations in 2016, then direct control with a confidence filter, verification, and human override.</a:t>
+            </a:r>
+            <a:endParaRPr lang="en-US" sz="1300" dirty="0"/>
+          </a:p>
+        </p:txBody>
+      </p:sp>
+      <p:sp>
+        <p:nvSpPr>
+          <p:cNvPr id="13" name="Card"/>
+          <p:cNvSpPr/>
+          <p:nvPr/>
+        </p:nvSpPr>
+        <p:spPr>
+          <a:xfrm>
+            <a:off x="8127797" y="1691640"/>
+            <a:ext cx="3515258" cy="2103120"/>
+          </a:xfrm>
+          <a:prstGeom prst="roundRect">
+            <a:avLst>
+              <a:gd name="adj" fmla="val 3478"/>
+            </a:avLst>
+          </a:prstGeom>
+          <a:solidFill>
+            <a:schemeClr val="tx1"/>
+          </a:solidFill>
+          <a:ln w="9525">
+            <a:solidFill>
+              <a:srgbClr val="0F1E3D"/>
+            </a:solidFill>
+            <a:prstDash val="solid"/>
+          </a:ln>
+        </p:spPr>
+      </p:sp>
+      <p:sp>
+        <p:nvSpPr>
+          <p:cNvPr id="14" name="Card label"/>
+          <p:cNvSpPr txBox="1"/>
+          <p:nvPr/>
+        </p:nvSpPr>
+        <p:spPr>
+          <a:xfrm>
+            <a:off x="8310677" y="1819656"/>
+            <a:ext cx="3149498" cy="310896"/>
+          </a:xfrm>
+          <a:prstGeom prst="rect">
+            <a:avLst/>
+          </a:prstGeom>
+          <a:noFill/>
+          <a:ln/>
+        </p:spPr>
+        <p:txBody>
+          <a:bodyPr wrap="square" lIns="0" tIns="0" rIns="0" bIns="0" rtlCol="0" anchor="ctr"/>
+          <a:lstStyle/>
+          <a:p>
+            <a:pPr indent="0" marL="0">
+              <a:buNone/>
+            </a:pPr>
+            <a:r>
+              <a:rPr lang="en-US" sz="1300" b="1" dirty="0">
+                <a:solidFill>
+                  <a:schemeClr val="accent1"/>
+                </a:solidFill>
+              </a:rPr>
+              <a:t>The result</a:t>
+            </a:r>
+            <a:endParaRPr lang="en-US" sz="1300" dirty="0"/>
+          </a:p>
+        </p:txBody>
+      </p:sp>
+      <p:sp>
+        <p:nvSpPr>
+          <p:cNvPr id="15" name="Card head"/>
+          <p:cNvSpPr txBox="1"/>
+          <p:nvPr/>
+        </p:nvSpPr>
+        <p:spPr>
+          <a:xfrm>
+            <a:off x="8310677" y="2148840"/>
+            <a:ext cx="3149498" cy="576072"/>
+          </a:xfrm>
+          <a:prstGeom prst="rect">
+            <a:avLst/>
+          </a:prstGeom>
+          <a:noFill/>
+          <a:ln/>
+        </p:spPr>
+        <p:txBody>
+          <a:bodyPr wrap="square" lIns="0" tIns="0" rIns="0" bIns="0" rtlCol="0" anchor="t"/>
+          <a:lstStyle/>
+          <a:p>
+            <a:pPr indent="0" marL="0">
+              <a:buNone/>
+            </a:pPr>
+            <a:r>
+              <a:rPr lang="en-US" sz="1600" b="1" dirty="0">
+                <a:solidFill>
+                  <a:schemeClr val="bg1"/>
+                </a:solidFill>
+                <a:latin typeface="Cambria" pitchFamily="34" charset="0"/>
+                <a:ea typeface="Cambria" pitchFamily="34" charset="-122"/>
+                <a:cs typeface="Cambria" pitchFamily="34" charset="-120"/>
+              </a:rPr>
+              <a:t>About 30% savings, by Google's account</a:t>
+            </a:r>
+            <a:endParaRPr lang="en-US" sz="1600" dirty="0"/>
+          </a:p>
+        </p:txBody>
+      </p:sp>
+      <p:sp>
+        <p:nvSpPr>
+          <p:cNvPr id="16" name="Card text"/>
+          <p:cNvSpPr txBox="1"/>
+          <p:nvPr/>
+        </p:nvSpPr>
+        <p:spPr>
+          <a:xfrm>
+            <a:off x="8310677" y="2798064"/>
+            <a:ext cx="3149498" cy="868680"/>
+          </a:xfrm>
+          <a:prstGeom prst="rect">
+            <a:avLst/>
+          </a:prstGeom>
+          <a:noFill/>
+          <a:ln/>
+        </p:spPr>
+        <p:txBody>
+          <a:bodyPr wrap="square" lIns="0" tIns="0" rIns="0" bIns="0" rtlCol="0" anchor="t"/>
+          <a:lstStyle/>
+          <a:p>
+            <a:pPr indent="0" marL="0">
+              <a:buNone/>
+            </a:pPr>
+            <a:r>
+              <a:rPr lang="en-US" sz="1300" dirty="0">
+                <a:solidFill>
+                  <a:schemeClr val="bg2"/>
+                </a:solidFill>
+              </a:rPr>
+              <a:t>Against the historical baseline, up from 12 percent at the launch of direct control.</a:t>
+            </a:r>
+            <a:endParaRPr lang="en-US" sz="1300" dirty="0"/>
+          </a:p>
+        </p:txBody>
+      </p:sp>
+      <p:sp>
+        <p:nvSpPr>
+          <p:cNvPr id="17" name="Card"/>
+          <p:cNvSpPr/>
+          <p:nvPr/>
+        </p:nvSpPr>
+        <p:spPr>
+          <a:xfrm>
+            <a:off x="548640" y="4069080"/>
+            <a:ext cx="3515258" cy="2103120"/>
+          </a:xfrm>
+          <a:prstGeom prst="roundRect">
+            <a:avLst>
+              <a:gd name="adj" fmla="val 3478"/>
+            </a:avLst>
+          </a:prstGeom>
+          <a:solidFill>
+            <a:schemeClr val="bg2"/>
+          </a:solidFill>
+          <a:ln w="9525">
+            <a:solidFill>
+              <a:srgbClr val="C4CBD8"/>
+            </a:solidFill>
+            <a:prstDash val="solid"/>
+          </a:ln>
+        </p:spPr>
+      </p:sp>
+      <p:sp>
+        <p:nvSpPr>
+          <p:cNvPr id="18" name="Card label"/>
+          <p:cNvSpPr txBox="1"/>
+          <p:nvPr/>
+        </p:nvSpPr>
+        <p:spPr>
+          <a:xfrm>
+            <a:off x="731520" y="4197096"/>
+            <a:ext cx="3149498" cy="310896"/>
+          </a:xfrm>
+          <a:prstGeom prst="rect">
+            <a:avLst/>
+          </a:prstGeom>
+          <a:noFill/>
+          <a:ln/>
+        </p:spPr>
+        <p:txBody>
+          <a:bodyPr wrap="square" lIns="0" tIns="0" rIns="0" bIns="0" rtlCol="0" anchor="ctr"/>
+          <a:lstStyle/>
+          <a:p>
+            <a:pPr indent="0" marL="0">
+              <a:buNone/>
+            </a:pPr>
+            <a:r>
+              <a:rPr lang="en-US" sz="1300" b="1" dirty="0">
+                <a:solidFill>
+                  <a:schemeClr val="accent1"/>
+                </a:solidFill>
+              </a:rPr>
+              <a:t>Making it work</a:t>
+            </a:r>
+            <a:endParaRPr lang="en-US" sz="1300" dirty="0"/>
+          </a:p>
+        </p:txBody>
+      </p:sp>
+      <p:sp>
+        <p:nvSpPr>
+          <p:cNvPr id="19" name="Card head"/>
+          <p:cNvSpPr txBox="1"/>
+          <p:nvPr/>
+        </p:nvSpPr>
+        <p:spPr>
+          <a:xfrm>
+            <a:off x="731520" y="4526280"/>
+            <a:ext cx="3149498" cy="576072"/>
+          </a:xfrm>
+          <a:prstGeom prst="rect">
+            <a:avLst/>
+          </a:prstGeom>
+          <a:noFill/>
+          <a:ln/>
+        </p:spPr>
+        <p:txBody>
+          <a:bodyPr wrap="square" lIns="0" tIns="0" rIns="0" bIns="0" rtlCol="0" anchor="t"/>
+          <a:lstStyle/>
+          <a:p>
+            <a:pPr indent="0" marL="0">
+              <a:buNone/>
+            </a:pPr>
+            <a:r>
+              <a:rPr lang="en-US" sz="1600" b="1" dirty="0">
+                <a:solidFill>
+                  <a:schemeClr val="tx1"/>
+                </a:solidFill>
+                <a:latin typeface="Cambria" pitchFamily="34" charset="0"/>
+                <a:ea typeface="Cambria" pitchFamily="34" charset="-122"/>
+                <a:cs typeface="Cambria" pitchFamily="34" charset="-120"/>
+              </a:rPr>
+              <a:t>From advice to control</a:t>
+            </a:r>
+            <a:endParaRPr lang="en-US" sz="1600" dirty="0"/>
+          </a:p>
+        </p:txBody>
+      </p:sp>
+      <p:sp>
+        <p:nvSpPr>
+          <p:cNvPr id="20" name="Card text"/>
+          <p:cNvSpPr txBox="1"/>
+          <p:nvPr/>
+        </p:nvSpPr>
+        <p:spPr>
+          <a:xfrm>
+            <a:off x="731520" y="5175504"/>
+            <a:ext cx="3149498" cy="868680"/>
+          </a:xfrm>
+          <a:prstGeom prst="rect">
+            <a:avLst/>
+          </a:prstGeom>
+          <a:noFill/>
+          <a:ln/>
+        </p:spPr>
+        <p:txBody>
+          <a:bodyPr wrap="square" lIns="0" tIns="0" rIns="0" bIns="0" rtlCol="0" anchor="t"/>
+          <a:lstStyle/>
+          <a:p>
+            <a:pPr indent="0" marL="0">
+              <a:buNone/>
+            </a:pPr>
+            <a:r>
+              <a:rPr lang="en-US" sz="1300" dirty="0">
+                <a:solidFill>
+                  <a:schemeClr val="tx2"/>
+                </a:solidFill>
+              </a:rPr>
+              <a:t>Operators found carrying out recommendations too much effort; control came with a switch they hold.</a:t>
+            </a:r>
+            <a:endParaRPr lang="en-US" sz="1300" dirty="0"/>
+          </a:p>
+        </p:txBody>
+      </p:sp>
+      <p:sp>
+        <p:nvSpPr>
+          <p:cNvPr id="21" name="Card"/>
+          <p:cNvSpPr/>
+          <p:nvPr/>
+        </p:nvSpPr>
+        <p:spPr>
+          <a:xfrm>
+            <a:off x="4338218" y="4069080"/>
+            <a:ext cx="3515258" cy="2103120"/>
+          </a:xfrm>
+          <a:prstGeom prst="roundRect">
+            <a:avLst>
+              <a:gd name="adj" fmla="val 3478"/>
+            </a:avLst>
+          </a:prstGeom>
+          <a:solidFill>
+            <a:schemeClr val="bg2"/>
+          </a:solidFill>
+          <a:ln w="9525">
+            <a:solidFill>
+              <a:srgbClr val="C4CBD8"/>
+            </a:solidFill>
+            <a:prstDash val="solid"/>
+          </a:ln>
+        </p:spPr>
+      </p:sp>
+      <p:sp>
+        <p:nvSpPr>
+          <p:cNvPr id="22" name="Card label"/>
+          <p:cNvSpPr txBox="1"/>
+          <p:nvPr/>
+        </p:nvSpPr>
+        <p:spPr>
+          <a:xfrm>
+            <a:off x="4521098" y="4197096"/>
+            <a:ext cx="3149498" cy="310896"/>
+          </a:xfrm>
+          <a:prstGeom prst="rect">
+            <a:avLst/>
+          </a:prstGeom>
+          <a:noFill/>
+          <a:ln/>
+        </p:spPr>
+        <p:txBody>
+          <a:bodyPr wrap="square" lIns="0" tIns="0" rIns="0" bIns="0" rtlCol="0" anchor="ctr"/>
+          <a:lstStyle/>
+          <a:p>
+            <a:pPr indent="0" marL="0">
+              <a:buNone/>
+            </a:pPr>
+            <a:r>
+              <a:rPr lang="en-US" sz="1300" b="1" dirty="0">
+                <a:solidFill>
+                  <a:schemeClr val="accent1"/>
+                </a:solidFill>
+              </a:rPr>
+              <a:t>What Meridian takes</a:t>
+            </a:r>
+            <a:endParaRPr lang="en-US" sz="1300" dirty="0"/>
+          </a:p>
+        </p:txBody>
+      </p:sp>
+      <p:sp>
+        <p:nvSpPr>
+          <p:cNvPr id="23" name="Card head"/>
+          <p:cNvSpPr txBox="1"/>
+          <p:nvPr/>
+        </p:nvSpPr>
+        <p:spPr>
+          <a:xfrm>
+            <a:off x="4521098" y="4526280"/>
+            <a:ext cx="3149498" cy="576072"/>
+          </a:xfrm>
+          <a:prstGeom prst="rect">
+            <a:avLst/>
+          </a:prstGeom>
+          <a:noFill/>
+          <a:ln/>
+        </p:spPr>
+        <p:txBody>
+          <a:bodyPr wrap="square" lIns="0" tIns="0" rIns="0" bIns="0" rtlCol="0" anchor="t"/>
+          <a:lstStyle/>
+          <a:p>
+            <a:pPr indent="0" marL="0">
+              <a:buNone/>
+            </a:pPr>
+            <a:r>
+              <a:rPr lang="en-US" sz="1600" b="1" dirty="0">
+                <a:solidFill>
+                  <a:schemeClr val="tx1"/>
+                </a:solidFill>
+                <a:latin typeface="Cambria" pitchFamily="34" charset="0"/>
+                <a:ea typeface="Cambria" pitchFamily="34" charset="-122"/>
+                <a:cs typeface="Cambria" pitchFamily="34" charset="-120"/>
+              </a:rPr>
+              <a:t>Guardrails and exploration</a:t>
+            </a:r>
+            <a:endParaRPr lang="en-US" sz="1600" dirty="0"/>
+          </a:p>
+        </p:txBody>
+      </p:sp>
+      <p:sp>
+        <p:nvSpPr>
+          <p:cNvPr id="24" name="Card text"/>
+          <p:cNvSpPr txBox="1"/>
+          <p:nvPr/>
+        </p:nvSpPr>
+        <p:spPr>
+          <a:xfrm>
+            <a:off x="4521098" y="5175504"/>
+            <a:ext cx="3149498" cy="868680"/>
+          </a:xfrm>
+          <a:prstGeom prst="rect">
+            <a:avLst/>
+          </a:prstGeom>
+          <a:noFill/>
+          <a:ln/>
+        </p:spPr>
+        <p:txBody>
+          <a:bodyPr wrap="square" lIns="0" tIns="0" rIns="0" bIns="0" rtlCol="0" anchor="t"/>
+          <a:lstStyle/>
+          <a:p>
+            <a:pPr indent="0" marL="0">
+              <a:buNone/>
+            </a:pPr>
+            <a:r>
+              <a:rPr lang="en-US" sz="1300" dirty="0">
+                <a:solidFill>
+                  <a:schemeClr val="tx2"/>
+                </a:solidFill>
+              </a:rPr>
+              <a:t>Records kept under one rule cannot say what untried actions would do: Worked Example 14.1.</a:t>
+            </a:r>
+            <a:endParaRPr lang="en-US" sz="1300" dirty="0"/>
+          </a:p>
+        </p:txBody>
+      </p:sp>
+      <p:sp>
+        <p:nvSpPr>
+          <p:cNvPr id="25" name="Card"/>
+          <p:cNvSpPr/>
+          <p:nvPr/>
+        </p:nvSpPr>
+        <p:spPr>
+          <a:xfrm>
+            <a:off x="8127797" y="4069080"/>
+            <a:ext cx="3515258" cy="2103120"/>
+          </a:xfrm>
+          <a:prstGeom prst="roundRect">
+            <a:avLst>
+              <a:gd name="adj" fmla="val 3478"/>
+            </a:avLst>
+          </a:prstGeom>
+          <a:solidFill>
+            <a:schemeClr val="bg2"/>
+          </a:solidFill>
+          <a:ln w="9525">
+            <a:solidFill>
+              <a:srgbClr val="C4CBD8"/>
+            </a:solidFill>
+            <a:prstDash val="solid"/>
+          </a:ln>
+        </p:spPr>
+      </p:sp>
+      <p:sp>
+        <p:nvSpPr>
+          <p:cNvPr id="26" name="Card label"/>
+          <p:cNvSpPr txBox="1"/>
+          <p:nvPr/>
+        </p:nvSpPr>
+        <p:spPr>
+          <a:xfrm>
+            <a:off x="8310677" y="4197096"/>
+            <a:ext cx="3149498" cy="310896"/>
+          </a:xfrm>
+          <a:prstGeom prst="rect">
+            <a:avLst/>
+          </a:prstGeom>
+          <a:noFill/>
+          <a:ln/>
+        </p:spPr>
+        <p:txBody>
+          <a:bodyPr wrap="square" lIns="0" tIns="0" rIns="0" bIns="0" rtlCol="0" anchor="ctr"/>
+          <a:lstStyle/>
+          <a:p>
+            <a:pPr indent="0" marL="0">
+              <a:buNone/>
+            </a:pPr>
+            <a:r>
+              <a:rPr lang="en-US" sz="1300" b="1" dirty="0">
+                <a:solidFill>
+                  <a:schemeClr val="accent1"/>
+                </a:solidFill>
+              </a:rPr>
+              <a:t>For the board</a:t>
+            </a:r>
+            <a:endParaRPr lang="en-US" sz="1300" dirty="0"/>
+          </a:p>
+        </p:txBody>
+      </p:sp>
+      <p:sp>
+        <p:nvSpPr>
+          <p:cNvPr id="27" name="Card head"/>
+          <p:cNvSpPr txBox="1"/>
+          <p:nvPr/>
+        </p:nvSpPr>
+        <p:spPr>
+          <a:xfrm>
+            <a:off x="8310677" y="4526280"/>
+            <a:ext cx="3149498" cy="576072"/>
+          </a:xfrm>
+          <a:prstGeom prst="rect">
+            <a:avLst/>
+          </a:prstGeom>
+          <a:noFill/>
+          <a:ln/>
+        </p:spPr>
+        <p:txBody>
+          <a:bodyPr wrap="square" lIns="0" tIns="0" rIns="0" bIns="0" rtlCol="0" anchor="t"/>
+          <a:lstStyle/>
+          <a:p>
+            <a:pPr indent="0" marL="0">
+              <a:buNone/>
+            </a:pPr>
+            <a:r>
+              <a:rPr lang="en-US" sz="1600" b="1" dirty="0">
+                <a:solidFill>
+                  <a:schemeClr val="tx1"/>
+                </a:solidFill>
+                <a:latin typeface="Cambria" pitchFamily="34" charset="0"/>
+                <a:ea typeface="Cambria" pitchFamily="34" charset="-122"/>
+                <a:cs typeface="Cambria" pitchFamily="34" charset="-120"/>
+              </a:rPr>
+              <a:t>Who can switch it off?</a:t>
+            </a:r>
+            <a:endParaRPr lang="en-US" sz="1600" dirty="0"/>
+          </a:p>
+        </p:txBody>
+      </p:sp>
+      <p:sp>
+        <p:nvSpPr>
+          <p:cNvPr id="28" name="Card text"/>
+          <p:cNvSpPr txBox="1"/>
+          <p:nvPr/>
+        </p:nvSpPr>
+        <p:spPr>
+          <a:xfrm>
+            <a:off x="8310677" y="5175504"/>
+            <a:ext cx="3149498" cy="868680"/>
+          </a:xfrm>
+          <a:prstGeom prst="rect">
+            <a:avLst/>
+          </a:prstGeom>
+          <a:noFill/>
+          <a:ln/>
+        </p:spPr>
+        <p:txBody>
+          <a:bodyPr wrap="square" lIns="0" tIns="0" rIns="0" bIns="0" rtlCol="0" anchor="t"/>
+          <a:lstStyle/>
+          <a:p>
+            <a:pPr indent="0" marL="0">
+              <a:buNone/>
+            </a:pPr>
+            <a:r>
+              <a:rPr lang="en-US" sz="1300" dirty="0">
+                <a:solidFill>
+                  <a:schemeClr val="tx2"/>
+                </a:solidFill>
+              </a:rPr>
+              <a:t>And on what signal does control return to people?</a:t>
+            </a:r>
+            <a:endParaRPr lang="en-US" sz="1300" dirty="0"/>
           </a:p>
         </p:txBody>
       </p:sp>
@@ -15358,7 +15431,7 @@
                   <a:schemeClr val="accent1"/>
                 </a:solidFill>
               </a:rPr>
-              <a:t>KEY TAKEAWAYS</a:t>
+              <a:t>AXIOM LAB 2.14 · MODULE AXIOM-14</a:t>
             </a:r>
             <a:endParaRPr lang="en-US" sz="1200" dirty="0"/>
           </a:p>
@@ -15399,22 +15472,105 @@
                 <a:ea typeface="Cambria" pitchFamily="34" charset="-122"/>
                 <a:cs typeface="Cambria" pitchFamily="34" charset="-120"/>
               </a:rPr>
-              <a:t>What to carry forward</a:t>
+              <a:t>Learning a rule by trial, in AXIOM</a:t>
             </a:r>
             <a:endParaRPr lang="en-US" sz="3200" dirty="0"/>
           </a:p>
         </p:txBody>
       </p:sp>
-      <p:sp>
-        <p:nvSpPr>
-          <p:cNvPr id="5" name="Number"/>
+      <p:pic>
+        <p:nvPicPr>
+          <p:cNvPr id="5" name="AXIOM logo" descr="AXIOM">    </p:cNvPr>
+          <p:cNvPicPr>
+            <a:picLocks noChangeAspect="1"/>
+          </p:cNvPicPr>
+          <p:nvPr/>
+        </p:nvPicPr>
+        <p:blipFill>
+          <a:blip r:embed="rId1"/>
+          <a:stretch>
+            <a:fillRect/>
+          </a:stretch>
+        </p:blipFill>
+        <p:spPr>
+          <a:xfrm>
+            <a:off x="9539935" y="310896"/>
+            <a:ext cx="2103120" cy="420624"/>
+          </a:xfrm>
+          <a:prstGeom prst="rect">
+            <a:avLst/>
+          </a:prstGeom>
+        </p:spPr>
+      </p:pic>
+      <p:sp>
+        <p:nvSpPr>
+          <p:cNvPr id="6" name="Situation"/>
+          <p:cNvSpPr txBox="1"/>
+          <p:nvPr/>
+        </p:nvSpPr>
+        <p:spPr>
+          <a:xfrm>
+            <a:off x="548640" y="1645920"/>
+            <a:ext cx="11094415" cy="777240"/>
+          </a:xfrm>
+          <a:prstGeom prst="rect">
+            <a:avLst/>
+          </a:prstGeom>
+          <a:noFill/>
+          <a:ln/>
+        </p:spPr>
+        <p:txBody>
+          <a:bodyPr wrap="square" lIns="0" tIns="0" rIns="0" bIns="0" rtlCol="0" anchor="t"/>
+          <a:lstStyle/>
+          <a:p>
+            <a:pPr indent="0" marL="0">
+              <a:buNone/>
+            </a:pPr>
+            <a:r>
+              <a:rPr lang="en-US" sz="1500" dirty="0">
+                <a:solidFill>
+                  <a:schemeClr val="tx1"/>
+                </a:solidFill>
+              </a:rPr>
+              <a:t>Digital Solutions' AI team proposes an agent that learns Meridian's hiring rule by acting. The chief human resources officer and the audit committee must decide whether, where, and within what limits it may learn. Open AXIOM, choose Lab 2.14 and load the Meridian hiring instance.</a:t>
+            </a:r>
+            <a:endParaRPr lang="en-US" sz="1500" dirty="0"/>
+          </a:p>
+        </p:txBody>
+      </p:sp>
+      <p:sp>
+        <p:nvSpPr>
+          <p:cNvPr id="7" name="Flow line"/>
           <p:cNvSpPr/>
           <p:nvPr/>
         </p:nvSpPr>
         <p:spPr>
           <a:xfrm>
-            <a:off x="548640" y="1737360"/>
-            <a:ext cx="566928" cy="566928"/>
+            <a:off x="1658082" y="2880360"/>
+            <a:ext cx="8875532" cy="0"/>
+          </a:xfrm>
+          <a:prstGeom prst="line">
+            <a:avLst/>
+          </a:prstGeom>
+          <a:noFill/>
+          <a:ln w="25400">
+            <a:solidFill>
+              <a:srgbClr val="C4CBD8"/>
+            </a:solidFill>
+            <a:prstDash val="solid"/>
+          </a:ln>
+        </p:spPr>
+      </p:sp>
+      <p:sp>
+        <p:nvSpPr>
+          <p:cNvPr id="8" name="Number"/>
+          <p:cNvSpPr/>
+          <p:nvPr/>
+        </p:nvSpPr>
+        <p:spPr>
+          <a:xfrm>
+            <a:off x="1383762" y="2606040"/>
+            <a:ext cx="548640" cy="548640"/>
           </a:xfrm>
           <a:prstGeom prst="ellipse">
             <a:avLst/>
@@ -15432,14 +15588,14 @@
       </p:sp>
       <p:sp>
         <p:nvSpPr>
-          <p:cNvPr id="6" name="Text 3"/>
+          <p:cNvPr id="9" name="Text 5"/>
           <p:cNvSpPr txBox="1"/>
           <p:nvPr/>
         </p:nvSpPr>
         <p:spPr>
           <a:xfrm>
-            <a:off x="548640" y="1737360"/>
-            <a:ext cx="566928" cy="566928"/>
+            <a:off x="1383762" y="2606040"/>
+            <a:ext cx="548640" cy="548640"/>
           </a:xfrm>
           <a:prstGeom prst="rect">
             <a:avLst/>
@@ -15455,7 +15611,7 @@
               <a:buNone/>
             </a:pPr>
             <a:r>
-              <a:rPr lang="en-US" sz="1500" b="1" dirty="0">
+              <a:rPr lang="en-US" sz="1600" b="1" dirty="0">
                 <a:solidFill>
                   <a:schemeClr val="bg1"/>
                 </a:solidFill>
@@ -15465,20 +15621,20 @@
               </a:rPr>
               <a:t>1</a:t>
             </a:r>
-            <a:endParaRPr lang="en-US" sz="1500" dirty="0"/>
-          </a:p>
-        </p:txBody>
-      </p:sp>
-      <p:sp>
-        <p:nvSpPr>
-          <p:cNvPr id="7" name="Row text"/>
+            <a:endParaRPr lang="en-US" sz="1600" dirty="0"/>
+          </a:p>
+        </p:txBody>
+      </p:sp>
+      <p:sp>
+        <p:nvSpPr>
+          <p:cNvPr id="10" name="Flow head"/>
           <p:cNvSpPr txBox="1"/>
           <p:nvPr/>
         </p:nvSpPr>
         <p:spPr>
           <a:xfrm>
-            <a:off x="1325880" y="1691640"/>
-            <a:ext cx="10317175" cy="841248"/>
+            <a:off x="621792" y="3291840"/>
+            <a:ext cx="2072579" cy="548640"/>
           </a:xfrm>
           <a:prstGeom prst="rect">
             <a:avLst/>
@@ -15487,34 +15643,73 @@
           <a:ln/>
         </p:spPr>
         <p:txBody>
-          <a:bodyPr wrap="square" lIns="0" tIns="0" rIns="0" bIns="0" rtlCol="0" anchor="ctr"/>
-          <a:lstStyle/>
-          <a:p>
-            <a:pPr indent="0" marL="0">
+          <a:bodyPr wrap="square" lIns="0" tIns="0" rIns="0" bIns="0" rtlCol="0" anchor="t"/>
+          <a:lstStyle/>
+          <a:p>
+            <a:pPr algn="ctr" indent="0" marL="0">
               <a:buNone/>
             </a:pPr>
             <a:r>
-              <a:rPr lang="en-US" sz="1500" dirty="0">
-                <a:solidFill>
-                  <a:schemeClr val="tx1"/>
-                </a:solidFill>
-              </a:rPr>
-              <a:t>Learning from acting writes the decision as a decision process; each decision changes the data that follow, so the learner must choose what to try.</a:t>
-            </a:r>
-            <a:endParaRPr lang="en-US" sz="1500" dirty="0"/>
-          </a:p>
-        </p:txBody>
-      </p:sp>
-      <p:sp>
-        <p:nvSpPr>
-          <p:cNvPr id="8" name="Number"/>
+              <a:rPr lang="en-US" sz="1600" b="1" dirty="0">
+                <a:solidFill>
+                  <a:schemeClr val="tx1"/>
+                </a:solidFill>
+                <a:latin typeface="Cambria" pitchFamily="34" charset="0"/>
+                <a:ea typeface="Cambria" pitchFamily="34" charset="-122"/>
+                <a:cs typeface="Cambria" pitchFamily="34" charset="-120"/>
+              </a:rPr>
+              <a:t>Benchmark</a:t>
+            </a:r>
+            <a:endParaRPr lang="en-US" sz="1600" dirty="0"/>
+          </a:p>
+        </p:txBody>
+      </p:sp>
+      <p:sp>
+        <p:nvSpPr>
+          <p:cNvPr id="11" name="Flow text"/>
+          <p:cNvSpPr txBox="1"/>
+          <p:nvPr/>
+        </p:nvSpPr>
+        <p:spPr>
+          <a:xfrm>
+            <a:off x="640080" y="3867912"/>
+            <a:ext cx="2036003" cy="1554480"/>
+          </a:xfrm>
+          <a:prstGeom prst="rect">
+            <a:avLst/>
+          </a:prstGeom>
+          <a:noFill/>
+          <a:ln/>
+        </p:spPr>
+        <p:txBody>
+          <a:bodyPr wrap="square" lIns="0" tIns="0" rIns="0" bIns="0" rtlCol="0" anchor="t"/>
+          <a:lstStyle/>
+          <a:p>
+            <a:pPr algn="ctr" indent="0" marL="0">
+              <a:buNone/>
+            </a:pPr>
+            <a:r>
+              <a:rPr lang="en-US" sz="1400" dirty="0">
+                <a:solidFill>
+                  <a:schemeClr val="tx2"/>
+                </a:solidFill>
+              </a:rPr>
+              <a:t>Solve the declared program by policy iteration: the best rule, its cost, the guardrail.</a:t>
+            </a:r>
+            <a:endParaRPr lang="en-US" sz="1400" dirty="0"/>
+          </a:p>
+        </p:txBody>
+      </p:sp>
+      <p:sp>
+        <p:nvSpPr>
+          <p:cNvPr id="12" name="Number"/>
           <p:cNvSpPr/>
           <p:nvPr/>
         </p:nvSpPr>
         <p:spPr>
           <a:xfrm>
-            <a:off x="548640" y="2633472"/>
-            <a:ext cx="566928" cy="566928"/>
+            <a:off x="3602645" y="2606040"/>
+            <a:ext cx="548640" cy="548640"/>
           </a:xfrm>
           <a:prstGeom prst="ellipse">
             <a:avLst/>
@@ -15532,14 +15727,14 @@
       </p:sp>
       <p:sp>
         <p:nvSpPr>
-          <p:cNvPr id="9" name="Text 6"/>
+          <p:cNvPr id="13" name="Text 9"/>
           <p:cNvSpPr txBox="1"/>
           <p:nvPr/>
         </p:nvSpPr>
         <p:spPr>
           <a:xfrm>
-            <a:off x="548640" y="2633472"/>
-            <a:ext cx="566928" cy="566928"/>
+            <a:off x="3602645" y="2606040"/>
+            <a:ext cx="548640" cy="548640"/>
           </a:xfrm>
           <a:prstGeom prst="rect">
             <a:avLst/>
@@ -15555,7 +15750,7 @@
               <a:buNone/>
             </a:pPr>
             <a:r>
-              <a:rPr lang="en-US" sz="1500" b="1" dirty="0">
+              <a:rPr lang="en-US" sz="1600" b="1" dirty="0">
                 <a:solidFill>
                   <a:schemeClr val="bg1"/>
                 </a:solidFill>
@@ -15565,20 +15760,20 @@
               </a:rPr>
               <a:t>2</a:t>
             </a:r>
-            <a:endParaRPr lang="en-US" sz="1500" dirty="0"/>
-          </a:p>
-        </p:txBody>
-      </p:sp>
-      <p:sp>
-        <p:nvSpPr>
-          <p:cNvPr id="10" name="Row text"/>
+            <a:endParaRPr lang="en-US" sz="1600" dirty="0"/>
+          </a:p>
+        </p:txBody>
+      </p:sp>
+      <p:sp>
+        <p:nvSpPr>
+          <p:cNvPr id="14" name="Flow head"/>
           <p:cNvSpPr txBox="1"/>
           <p:nvPr/>
         </p:nvSpPr>
         <p:spPr>
           <a:xfrm>
-            <a:off x="1325880" y="2587752"/>
-            <a:ext cx="10317175" cy="841248"/>
+            <a:off x="2840675" y="3291840"/>
+            <a:ext cx="2072579" cy="548640"/>
           </a:xfrm>
           <a:prstGeom prst="rect">
             <a:avLst/>
@@ -15587,34 +15782,73 @@
           <a:ln/>
         </p:spPr>
         <p:txBody>
-          <a:bodyPr wrap="square" lIns="0" tIns="0" rIns="0" bIns="0" rtlCol="0" anchor="ctr"/>
-          <a:lstStyle/>
-          <a:p>
-            <a:pPr indent="0" marL="0">
+          <a:bodyPr wrap="square" lIns="0" tIns="0" rIns="0" bIns="0" rtlCol="0" anchor="t"/>
+          <a:lstStyle/>
+          <a:p>
+            <a:pPr algn="ctr" indent="0" marL="0">
               <a:buNone/>
             </a:pPr>
             <a:r>
-              <a:rPr lang="en-US" sz="1500" dirty="0">
-                <a:solidFill>
-                  <a:schemeClr val="tx1"/>
-                </a:solidFill>
-              </a:rPr>
-              <a:t>Learning by trial finds the best rule if every decision keeps being tried and the steps shrink at the right pace, but slowly; errors count where the rule goes, and untried decisions, constant steps, and fitted values off the rule's path break it.</a:t>
-            </a:r>
-            <a:endParaRPr lang="en-US" sz="1500" dirty="0"/>
-          </a:p>
-        </p:txBody>
-      </p:sp>
-      <p:sp>
-        <p:nvSpPr>
-          <p:cNvPr id="11" name="Number"/>
+              <a:rPr lang="en-US" sz="1600" b="1" dirty="0">
+                <a:solidFill>
+                  <a:schemeClr val="tx1"/>
+                </a:solidFill>
+                <a:latin typeface="Cambria" pitchFamily="34" charset="0"/>
+                <a:ea typeface="Cambria" pitchFamily="34" charset="-122"/>
+                <a:cs typeface="Cambria" pitchFamily="34" charset="-120"/>
+              </a:rPr>
+              <a:t>Train by trial</a:t>
+            </a:r>
+            <a:endParaRPr lang="en-US" sz="1600" dirty="0"/>
+          </a:p>
+        </p:txBody>
+      </p:sp>
+      <p:sp>
+        <p:nvSpPr>
+          <p:cNvPr id="15" name="Flow text"/>
+          <p:cNvSpPr txBox="1"/>
+          <p:nvPr/>
+        </p:nvSpPr>
+        <p:spPr>
+          <a:xfrm>
+            <a:off x="2858963" y="3867912"/>
+            <a:ext cx="2036003" cy="1554480"/>
+          </a:xfrm>
+          <a:prstGeom prst="rect">
+            <a:avLst/>
+          </a:prstGeom>
+          <a:noFill/>
+          <a:ln/>
+        </p:spPr>
+        <p:txBody>
+          <a:bodyPr wrap="square" lIns="0" tIns="0" rIns="0" bIns="0" rtlCol="0" anchor="t"/>
+          <a:lstStyle/>
+          <a:p>
+            <a:pPr algn="ctr" indent="0" marL="0">
+              <a:buNone/>
+            </a:pPr>
+            <a:r>
+              <a:rPr lang="en-US" sz="1400" dirty="0">
+                <a:solidFill>
+                  <a:schemeClr val="tx2"/>
+                </a:solidFill>
+              </a:rPr>
+              <a:t>Q-learning in the simulator to a million quarters with several step sizes; price each rule.</a:t>
+            </a:r>
+            <a:endParaRPr lang="en-US" sz="1400" dirty="0"/>
+          </a:p>
+        </p:txBody>
+      </p:sp>
+      <p:sp>
+        <p:nvSpPr>
+          <p:cNvPr id="16" name="Number"/>
           <p:cNvSpPr/>
           <p:nvPr/>
         </p:nvSpPr>
         <p:spPr>
           <a:xfrm>
-            <a:off x="548640" y="3529584"/>
-            <a:ext cx="566928" cy="566928"/>
+            <a:off x="5821528" y="2606040"/>
+            <a:ext cx="548640" cy="548640"/>
           </a:xfrm>
           <a:prstGeom prst="ellipse">
             <a:avLst/>
@@ -15632,14 +15866,14 @@
       </p:sp>
       <p:sp>
         <p:nvSpPr>
-          <p:cNvPr id="12" name="Text 9"/>
+          <p:cNvPr id="17" name="Text 13"/>
           <p:cNvSpPr txBox="1"/>
           <p:nvPr/>
         </p:nvSpPr>
         <p:spPr>
           <a:xfrm>
-            <a:off x="548640" y="3529584"/>
-            <a:ext cx="566928" cy="566928"/>
+            <a:off x="5821528" y="2606040"/>
+            <a:ext cx="548640" cy="548640"/>
           </a:xfrm>
           <a:prstGeom prst="rect">
             <a:avLst/>
@@ -15655,7 +15889,7 @@
               <a:buNone/>
             </a:pPr>
             <a:r>
-              <a:rPr lang="en-US" sz="1500" b="1" dirty="0">
+              <a:rPr lang="en-US" sz="1600" b="1" dirty="0">
                 <a:solidFill>
                   <a:schemeClr val="bg1"/>
                 </a:solidFill>
@@ -15665,20 +15899,20 @@
               </a:rPr>
               <a:t>3</a:t>
             </a:r>
-            <a:endParaRPr lang="en-US" sz="1500" dirty="0"/>
-          </a:p>
-        </p:txBody>
-      </p:sp>
-      <p:sp>
-        <p:nvSpPr>
-          <p:cNvPr id="13" name="Row text"/>
+            <a:endParaRPr lang="en-US" sz="1600" dirty="0"/>
+          </a:p>
+        </p:txBody>
+      </p:sp>
+      <p:sp>
+        <p:nvSpPr>
+          <p:cNvPr id="18" name="Flow head"/>
           <p:cNvSpPr txBox="1"/>
           <p:nvPr/>
         </p:nvSpPr>
         <p:spPr>
           <a:xfrm>
-            <a:off x="1325880" y="3483864"/>
-            <a:ext cx="10317175" cy="841248"/>
+            <a:off x="5059558" y="3291840"/>
+            <a:ext cx="2072579" cy="548640"/>
           </a:xfrm>
           <a:prstGeom prst="rect">
             <a:avLst/>
@@ -15687,34 +15921,73 @@
           <a:ln/>
         </p:spPr>
         <p:txBody>
-          <a:bodyPr wrap="square" lIns="0" tIns="0" rIns="0" bIns="0" rtlCol="0" anchor="ctr"/>
-          <a:lstStyle/>
-          <a:p>
-            <a:pPr indent="0" marL="0">
+          <a:bodyPr wrap="square" lIns="0" tIns="0" rIns="0" bIns="0" rtlCol="0" anchor="t"/>
+          <a:lstStyle/>
+          <a:p>
+            <a:pPr algn="ctr" indent="0" marL="0">
               <a:buNone/>
             </a:pPr>
             <a:r>
-              <a:rPr lang="en-US" sz="1500" dirty="0">
-                <a:solidFill>
-                  <a:schemeClr val="tx1"/>
-                </a:solidFill>
-              </a:rPr>
-              <a:t>Exploration has a price: greed can lose in proportion to the trials, optimism only in their logarithm, and no learner does better. On the company the price is paid in money.</a:t>
-            </a:r>
-            <a:endParaRPr lang="en-US" sz="1500" dirty="0"/>
-          </a:p>
-        </p:txBody>
-      </p:sp>
-      <p:sp>
-        <p:nvSpPr>
-          <p:cNvPr id="14" name="Number"/>
+              <a:rPr lang="en-US" sz="1600" b="1" dirty="0">
+                <a:solidFill>
+                  <a:schemeClr val="tx1"/>
+                </a:solidFill>
+                <a:latin typeface="Cambria" pitchFamily="34" charset="0"/>
+                <a:ea typeface="Cambria" pitchFamily="34" charset="-122"/>
+                <a:cs typeface="Cambria" pitchFamily="34" charset="-120"/>
+              </a:rPr>
+              <a:t>Price exploration</a:t>
+            </a:r>
+            <a:endParaRPr lang="en-US" sz="1600" dirty="0"/>
+          </a:p>
+        </p:txBody>
+      </p:sp>
+      <p:sp>
+        <p:nvSpPr>
+          <p:cNvPr id="19" name="Flow text"/>
+          <p:cNvSpPr txBox="1"/>
+          <p:nvPr/>
+        </p:nvSpPr>
+        <p:spPr>
+          <a:xfrm>
+            <a:off x="5077846" y="3867912"/>
+            <a:ext cx="2036003" cy="1554480"/>
+          </a:xfrm>
+          <a:prstGeom prst="rect">
+            <a:avLst/>
+          </a:prstGeom>
+          <a:noFill/>
+          <a:ln/>
+        </p:spPr>
+        <p:txBody>
+          <a:bodyPr wrap="square" lIns="0" tIns="0" rIns="0" bIns="0" rtlCol="0" anchor="t"/>
+          <a:lstStyle/>
+          <a:p>
+            <a:pPr algn="ctr" indent="0" marL="0">
+              <a:buNone/>
+            </a:pPr>
+            <a:r>
+              <a:rPr lang="en-US" sz="1400" dirty="0">
+                <a:solidFill>
+                  <a:schemeClr val="tx2"/>
+                </a:solidFill>
+              </a:rPr>
+              <a:t>Greedy, randomized and optimistic choice among the target rules.</a:t>
+            </a:r>
+            <a:endParaRPr lang="en-US" sz="1400" dirty="0"/>
+          </a:p>
+        </p:txBody>
+      </p:sp>
+      <p:sp>
+        <p:nvSpPr>
+          <p:cNvPr id="20" name="Number"/>
           <p:cNvSpPr/>
           <p:nvPr/>
         </p:nvSpPr>
         <p:spPr>
           <a:xfrm>
-            <a:off x="548640" y="4425696"/>
-            <a:ext cx="566928" cy="566928"/>
+            <a:off x="8040411" y="2606040"/>
+            <a:ext cx="548640" cy="548640"/>
           </a:xfrm>
           <a:prstGeom prst="ellipse">
             <a:avLst/>
@@ -15732,14 +16005,14 @@
       </p:sp>
       <p:sp>
         <p:nvSpPr>
-          <p:cNvPr id="15" name="Text 12"/>
+          <p:cNvPr id="21" name="Text 17"/>
           <p:cNvSpPr txBox="1"/>
           <p:nvPr/>
         </p:nvSpPr>
         <p:spPr>
           <a:xfrm>
-            <a:off x="548640" y="4425696"/>
-            <a:ext cx="566928" cy="566928"/>
+            <a:off x="8040411" y="2606040"/>
+            <a:ext cx="548640" cy="548640"/>
           </a:xfrm>
           <a:prstGeom prst="rect">
             <a:avLst/>
@@ -15755,7 +16028,7 @@
               <a:buNone/>
             </a:pPr>
             <a:r>
-              <a:rPr lang="en-US" sz="1500" b="1" dirty="0">
+              <a:rPr lang="en-US" sz="1600" b="1" dirty="0">
                 <a:solidFill>
                   <a:schemeClr val="bg1"/>
                 </a:solidFill>
@@ -15765,20 +16038,20 @@
               </a:rPr>
               <a:t>4</a:t>
             </a:r>
-            <a:endParaRPr lang="en-US" sz="1500" dirty="0"/>
-          </a:p>
-        </p:txBody>
-      </p:sp>
-      <p:sp>
-        <p:nvSpPr>
-          <p:cNvPr id="16" name="Row text"/>
+            <a:endParaRPr lang="en-US" sz="1600" dirty="0"/>
+          </a:p>
+        </p:txBody>
+      </p:sp>
+      <p:sp>
+        <p:nvSpPr>
+          <p:cNvPr id="22" name="Flow head"/>
           <p:cNvSpPr txBox="1"/>
           <p:nvPr/>
         </p:nvSpPr>
         <p:spPr>
           <a:xfrm>
-            <a:off x="1325880" y="4379976"/>
-            <a:ext cx="10317175" cy="841248"/>
+            <a:off x="7278441" y="3291840"/>
+            <a:ext cx="2072579" cy="548640"/>
           </a:xfrm>
           <a:prstGeom prst="rect">
             <a:avLst/>
@@ -15787,34 +16060,73 @@
           <a:ln/>
         </p:spPr>
         <p:txBody>
-          <a:bodyPr wrap="square" lIns="0" tIns="0" rIns="0" bIns="0" rtlCol="0" anchor="ctr"/>
-          <a:lstStyle/>
-          <a:p>
-            <a:pPr indent="0" marL="0">
+          <a:bodyPr wrap="square" lIns="0" tIns="0" rIns="0" bIns="0" rtlCol="0" anchor="t"/>
+          <a:lstStyle/>
+          <a:p>
+            <a:pPr algn="ctr" indent="0" marL="0">
               <a:buNone/>
             </a:pPr>
             <a:r>
-              <a:rPr lang="en-US" sz="1500" dirty="0">
-                <a:solidFill>
-                  <a:schemeClr val="tx1"/>
-                </a:solidFill>
-              </a:rPr>
-              <a:t>A simulator learned from records of the outside events makes trials cheap and improves as the record grows; a record kept under one rule cannot reveal what other decisions do.</a:t>
-            </a:r>
-            <a:endParaRPr lang="en-US" sz="1500" dirty="0"/>
-          </a:p>
-        </p:txBody>
-      </p:sp>
-      <p:sp>
-        <p:nvSpPr>
-          <p:cNvPr id="17" name="Number"/>
+              <a:rPr lang="en-US" sz="1600" b="1" dirty="0">
+                <a:solidFill>
+                  <a:schemeClr val="tx1"/>
+                </a:solidFill>
+                <a:latin typeface="Cambria" pitchFamily="34" charset="0"/>
+                <a:ea typeface="Cambria" pitchFamily="34" charset="-122"/>
+                <a:cs typeface="Cambria" pitchFamily="34" charset="-120"/>
+              </a:rPr>
+              <a:t>Learn a simulator</a:t>
+            </a:r>
+            <a:endParaRPr lang="en-US" sz="1600" dirty="0"/>
+          </a:p>
+        </p:txBody>
+      </p:sp>
+      <p:sp>
+        <p:nvSpPr>
+          <p:cNvPr id="23" name="Flow text"/>
+          <p:cNvSpPr txBox="1"/>
+          <p:nvPr/>
+        </p:nvSpPr>
+        <p:spPr>
+          <a:xfrm>
+            <a:off x="7296729" y="3867912"/>
+            <a:ext cx="2036003" cy="1554480"/>
+          </a:xfrm>
+          <a:prstGeom prst="rect">
+            <a:avLst/>
+          </a:prstGeom>
+          <a:noFill/>
+          <a:ln/>
+        </p:spPr>
+        <p:txBody>
+          <a:bodyPr wrap="square" lIns="0" tIns="0" rIns="0" bIns="0" rtlCol="0" anchor="t"/>
+          <a:lstStyle/>
+          <a:p>
+            <a:pPr algn="ctr" indent="0" marL="0">
+              <a:buNone/>
+            </a:pPr>
+            <a:r>
+              <a:rPr lang="en-US" sz="1400" dirty="0">
+                <a:solidFill>
+                  <a:schemeClr val="tx2"/>
+                </a:solidFill>
+              </a:rPr>
+              <a:t>Learn the swings from 12, 40 and 120 quarters; fit the dynamics to practice.</a:t>
+            </a:r>
+            <a:endParaRPr lang="en-US" sz="1400" dirty="0"/>
+          </a:p>
+        </p:txBody>
+      </p:sp>
+      <p:sp>
+        <p:nvSpPr>
+          <p:cNvPr id="24" name="Number"/>
           <p:cNvSpPr/>
           <p:nvPr/>
         </p:nvSpPr>
         <p:spPr>
           <a:xfrm>
-            <a:off x="548640" y="5321808"/>
-            <a:ext cx="566928" cy="566928"/>
+            <a:off x="10259294" y="2606040"/>
+            <a:ext cx="548640" cy="548640"/>
           </a:xfrm>
           <a:prstGeom prst="ellipse">
             <a:avLst/>
@@ -15832,14 +16144,14 @@
       </p:sp>
       <p:sp>
         <p:nvSpPr>
-          <p:cNvPr id="18" name="Text 15"/>
+          <p:cNvPr id="25" name="Text 21"/>
           <p:cNvSpPr txBox="1"/>
           <p:nvPr/>
         </p:nvSpPr>
         <p:spPr>
           <a:xfrm>
-            <a:off x="548640" y="5321808"/>
-            <a:ext cx="566928" cy="566928"/>
+            <a:off x="10259294" y="2606040"/>
+            <a:ext cx="548640" cy="548640"/>
           </a:xfrm>
           <a:prstGeom prst="rect">
             <a:avLst/>
@@ -15855,7 +16167,7 @@
               <a:buNone/>
             </a:pPr>
             <a:r>
-              <a:rPr lang="en-US" sz="1500" b="1" dirty="0">
+              <a:rPr lang="en-US" sz="1600" b="1" dirty="0">
                 <a:solidFill>
                   <a:schemeClr val="bg1"/>
                 </a:solidFill>
@@ -15865,20 +16177,20 @@
               </a:rPr>
               <a:t>5</a:t>
             </a:r>
-            <a:endParaRPr lang="en-US" sz="1500" dirty="0"/>
-          </a:p>
-        </p:txBody>
-      </p:sp>
-      <p:sp>
-        <p:nvSpPr>
-          <p:cNvPr id="19" name="Row text"/>
+            <a:endParaRPr lang="en-US" sz="1600" dirty="0"/>
+          </a:p>
+        </p:txBody>
+      </p:sp>
+      <p:sp>
+        <p:nvSpPr>
+          <p:cNvPr id="26" name="Flow head"/>
           <p:cNvSpPr txBox="1"/>
           <p:nvPr/>
         </p:nvSpPr>
         <p:spPr>
           <a:xfrm>
-            <a:off x="1325880" y="5276088"/>
-            <a:ext cx="10317175" cy="841248"/>
+            <a:off x="9497324" y="3291840"/>
+            <a:ext cx="2072579" cy="548640"/>
           </a:xfrm>
           <a:prstGeom prst="rect">
             <a:avLst/>
@@ -15887,6 +16199,108 @@
           <a:ln/>
         </p:spPr>
         <p:txBody>
+          <a:bodyPr wrap="square" lIns="0" tIns="0" rIns="0" bIns="0" rtlCol="0" anchor="t"/>
+          <a:lstStyle/>
+          <a:p>
+            <a:pPr algn="ctr" indent="0" marL="0">
+              <a:buNone/>
+            </a:pPr>
+            <a:r>
+              <a:rPr lang="en-US" sz="1600" b="1" dirty="0">
+                <a:solidFill>
+                  <a:schemeClr val="tx1"/>
+                </a:solidFill>
+                <a:latin typeface="Cambria" pitchFamily="34" charset="0"/>
+                <a:ea typeface="Cambria" pitchFamily="34" charset="-122"/>
+                <a:cs typeface="Cambria" pitchFamily="34" charset="-120"/>
+              </a:rPr>
+              <a:t>Learn on the company</a:t>
+            </a:r>
+            <a:endParaRPr lang="en-US" sz="1600" dirty="0"/>
+          </a:p>
+        </p:txBody>
+      </p:sp>
+      <p:sp>
+        <p:nvSpPr>
+          <p:cNvPr id="27" name="Flow text"/>
+          <p:cNvSpPr txBox="1"/>
+          <p:nvPr/>
+        </p:nvSpPr>
+        <p:spPr>
+          <a:xfrm>
+            <a:off x="9515612" y="3867912"/>
+            <a:ext cx="2036003" cy="1554480"/>
+          </a:xfrm>
+          <a:prstGeom prst="rect">
+            <a:avLst/>
+          </a:prstGeom>
+          <a:noFill/>
+          <a:ln/>
+        </p:spPr>
+        <p:txBody>
+          <a:bodyPr wrap="square" lIns="0" tIns="0" rIns="0" bIns="0" rtlCol="0" anchor="t"/>
+          <a:lstStyle/>
+          <a:p>
+            <a:pPr algn="ctr" indent="0" marL="0">
+              <a:buNone/>
+            </a:pPr>
+            <a:r>
+              <a:rPr lang="en-US" sz="1400" dirty="0">
+                <a:solidFill>
+                  <a:schemeClr val="tx2"/>
+                </a:solidFill>
+              </a:rPr>
+              <a:t>Forty quarters with and without the guardrail, against the worst rule inside it.</a:t>
+            </a:r>
+            <a:endParaRPr lang="en-US" sz="1400" dirty="0"/>
+          </a:p>
+        </p:txBody>
+      </p:sp>
+      <p:sp>
+        <p:nvSpPr>
+          <p:cNvPr id="28" name="Deliverable card"/>
+          <p:cNvSpPr/>
+          <p:nvPr/>
+        </p:nvSpPr>
+        <p:spPr>
+          <a:xfrm>
+            <a:off x="548640" y="5486400"/>
+            <a:ext cx="11094415" cy="685800"/>
+          </a:xfrm>
+          <a:prstGeom prst="roundRect">
+            <a:avLst>
+              <a:gd name="adj" fmla="val 10667"/>
+            </a:avLst>
+          </a:prstGeom>
+          <a:solidFill>
+            <a:schemeClr val="bg2"/>
+          </a:solidFill>
+          <a:ln w="9525">
+            <a:solidFill>
+              <a:srgbClr val="C4CBD8"/>
+            </a:solidFill>
+            <a:prstDash val="solid"/>
+          </a:ln>
+        </p:spPr>
+      </p:sp>
+      <p:sp>
+        <p:nvSpPr>
+          <p:cNvPr id="29" name="Deliverable"/>
+          <p:cNvSpPr txBox="1"/>
+          <p:nvPr/>
+        </p:nvSpPr>
+        <p:spPr>
+          <a:xfrm>
+            <a:off x="777240" y="5559552"/>
+            <a:ext cx="10637215" cy="539496"/>
+          </a:xfrm>
+          <a:prstGeom prst="rect">
+            <a:avLst/>
+          </a:prstGeom>
+          <a:noFill/>
+          <a:ln/>
+        </p:spPr>
+        <p:txBody>
           <a:bodyPr wrap="square" lIns="0" tIns="0" rIns="0" bIns="0" rtlCol="0" anchor="ctr"/>
           <a:lstStyle/>
           <a:p>
@@ -15894,14 +16308,22 @@
               <a:buNone/>
             </a:pPr>
             <a:r>
-              <a:rPr lang="en-US" sz="1500" dirty="0">
-                <a:solidFill>
-                  <a:schemeClr val="tx1"/>
-                </a:solidFill>
-              </a:rPr>
-              <a:t>A guardrail that holds a best rule costs nothing and caps the damage; every proposal is certified under the declared model, and many agents are coordinated by a price. Meridian's agent would lose $545.5 million learning on the company, and $1.2 million inside the guardrail.</a:t>
-            </a:r>
-            <a:endParaRPr lang="en-US" sz="1500" dirty="0"/>
+              <a:rPr lang="en-US" sz="1400" b="1" dirty="0">
+                <a:solidFill>
+                  <a:schemeClr val="tx1"/>
+                </a:solidFill>
+              </a:rPr>
+              <a:t>Deliverable:</a:t>
+            </a:r>
+            <a:r>
+              <a:rPr lang="en-US" sz="1400" dirty="0">
+                <a:solidFill>
+                  <a:schemeClr val="tx1"/>
+                </a:solidFill>
+              </a:rPr>
+              <a:t> a one-page note to the board: whether and where the agent may learn, the guardrail and what it costs, the certificate the audit committee requires, and the records the engineering office should keep. About 75 minutes.</a:t>
+            </a:r>
+            <a:endParaRPr lang="en-US" sz="1400" dirty="0"/>
           </a:p>
         </p:txBody>
       </p:sp>
@@ -16007,7 +16429,7 @@
                   <a:schemeClr val="accent1"/>
                 </a:solidFill>
               </a:rPr>
-              <a:t>THIS WEEK'S LABORATORY</a:t>
+              <a:t>KEY TAKEAWAYS</a:t>
             </a:r>
             <a:endParaRPr lang="en-US" sz="1200" dirty="0"/>
           </a:p>
@@ -16048,7 +16470,7 @@
                 <a:ea typeface="Cambria" pitchFamily="34" charset="-122"/>
                 <a:cs typeface="Cambria" pitchFamily="34" charset="-120"/>
               </a:rPr>
-              <a:t>Notebook and workbook reproduce the book</a:t>
+              <a:t>What to carry forward</a:t>
             </a:r>
             <a:endParaRPr lang="en-US" sz="3200" dirty="0"/>
           </a:p>
@@ -16056,26 +16478,24 @@
       </p:sp>
       <p:sp>
         <p:nvSpPr>
-          <p:cNvPr id="5" name="Stat card"/>
+          <p:cNvPr id="5" name="Number"/>
           <p:cNvSpPr/>
           <p:nvPr/>
         </p:nvSpPr>
         <p:spPr>
           <a:xfrm>
-            <a:off x="548640" y="1691640"/>
-            <a:ext cx="2567864" cy="1691640"/>
-          </a:xfrm>
-          <a:prstGeom prst="roundRect">
-            <a:avLst>
-              <a:gd name="adj" fmla="val 4324"/>
-            </a:avLst>
+            <a:off x="548640" y="1737360"/>
+            <a:ext cx="566928" cy="566928"/>
+          </a:xfrm>
+          <a:prstGeom prst="ellipse">
+            <a:avLst/>
           </a:prstGeom>
           <a:solidFill>
-            <a:schemeClr val="tx1"/>
+            <a:schemeClr val="accent1"/>
           </a:solidFill>
-          <a:ln w="9525">
+          <a:ln w="6350">
             <a:solidFill>
-              <a:srgbClr val="0F1E3D"/>
+              <a:schemeClr val="accent1"/>
             </a:solidFill>
             <a:prstDash val="solid"/>
           </a:ln>
@@ -16083,14 +16503,14 @@
       </p:sp>
       <p:sp>
         <p:nvSpPr>
-          <p:cNvPr id="6" name="Stat value"/>
+          <p:cNvPr id="6" name="Text 3"/>
           <p:cNvSpPr txBox="1"/>
           <p:nvPr/>
         </p:nvSpPr>
         <p:spPr>
           <a:xfrm>
-            <a:off x="685800" y="1801368"/>
-            <a:ext cx="2293544" cy="914400"/>
+            <a:off x="548640" y="1737360"/>
+            <a:ext cx="566928" cy="566928"/>
           </a:xfrm>
           <a:prstGeom prst="rect">
             <a:avLst/>
@@ -16106,30 +16526,30 @@
               <a:buNone/>
             </a:pPr>
             <a:r>
-              <a:rPr lang="en-US" sz="4400" b="1" dirty="0">
-                <a:solidFill>
-                  <a:schemeClr val="accent1"/>
-                </a:solidFill>
-                <a:latin typeface="Cambria" pitchFamily="34" charset="0"/>
-                <a:ea typeface="Cambria" pitchFamily="34" charset="-122"/>
-                <a:cs typeface="Cambria" pitchFamily="34" charset="-120"/>
-              </a:rPr>
-              <a:t>211</a:t>
-            </a:r>
-            <a:endParaRPr lang="en-US" sz="4400" dirty="0"/>
-          </a:p>
-        </p:txBody>
-      </p:sp>
-      <p:sp>
-        <p:nvSpPr>
-          <p:cNvPr id="7" name="Stat label"/>
+              <a:rPr lang="en-US" sz="1500" b="1" dirty="0">
+                <a:solidFill>
+                  <a:schemeClr val="bg1"/>
+                </a:solidFill>
+                <a:latin typeface="Calibri" pitchFamily="34" charset="0"/>
+                <a:ea typeface="Calibri" pitchFamily="34" charset="-122"/>
+                <a:cs typeface="Calibri" pitchFamily="34" charset="-120"/>
+              </a:rPr>
+              <a:t>1</a:t>
+            </a:r>
+            <a:endParaRPr lang="en-US" sz="1500" dirty="0"/>
+          </a:p>
+        </p:txBody>
+      </p:sp>
+      <p:sp>
+        <p:nvSpPr>
+          <p:cNvPr id="7" name="Row text"/>
           <p:cNvSpPr txBox="1"/>
           <p:nvPr/>
         </p:nvSpPr>
         <p:spPr>
           <a:xfrm>
-            <a:off x="685800" y="2697480"/>
-            <a:ext cx="2293544" cy="612648"/>
+            <a:off x="1325880" y="1691640"/>
+            <a:ext cx="10317175" cy="841248"/>
           </a:xfrm>
           <a:prstGeom prst="rect">
             <a:avLst/>
@@ -16138,46 +16558,44 @@
           <a:ln/>
         </p:spPr>
         <p:txBody>
-          <a:bodyPr wrap="square" lIns="0" tIns="0" rIns="0" bIns="0" rtlCol="0" anchor="t"/>
-          <a:lstStyle/>
-          <a:p>
-            <a:pPr algn="ctr" indent="0" marL="0">
+          <a:bodyPr wrap="square" lIns="0" tIns="0" rIns="0" bIns="0" rtlCol="0" anchor="ctr"/>
+          <a:lstStyle/>
+          <a:p>
+            <a:pPr indent="0" marL="0">
               <a:buNone/>
             </a:pPr>
             <a:r>
-              <a:rPr lang="en-US" sz="1400" dirty="0">
-                <a:solidFill>
-                  <a:schemeClr val="bg2"/>
-                </a:solidFill>
-              </a:rPr>
-              <a:t>notebook checkpoints, every one PASS</a:t>
-            </a:r>
-            <a:endParaRPr lang="en-US" sz="1400" dirty="0"/>
-          </a:p>
-        </p:txBody>
-      </p:sp>
-      <p:sp>
-        <p:nvSpPr>
-          <p:cNvPr id="8" name="Stat card"/>
+              <a:rPr lang="en-US" sz="1500" dirty="0">
+                <a:solidFill>
+                  <a:schemeClr val="tx1"/>
+                </a:solidFill>
+              </a:rPr>
+              <a:t>Learning from acting writes the decision as a decision process; each decision changes the data that follow, so the learner must choose what to try.</a:t>
+            </a:r>
+            <a:endParaRPr lang="en-US" sz="1500" dirty="0"/>
+          </a:p>
+        </p:txBody>
+      </p:sp>
+      <p:sp>
+        <p:nvSpPr>
+          <p:cNvPr id="8" name="Number"/>
           <p:cNvSpPr/>
           <p:nvPr/>
         </p:nvSpPr>
         <p:spPr>
           <a:xfrm>
-            <a:off x="3390824" y="1691640"/>
-            <a:ext cx="2567864" cy="1691640"/>
-          </a:xfrm>
-          <a:prstGeom prst="roundRect">
-            <a:avLst>
-              <a:gd name="adj" fmla="val 4324"/>
-            </a:avLst>
+            <a:off x="548640" y="2633472"/>
+            <a:ext cx="566928" cy="566928"/>
+          </a:xfrm>
+          <a:prstGeom prst="ellipse">
+            <a:avLst/>
           </a:prstGeom>
           <a:solidFill>
-            <a:schemeClr val="bg2"/>
+            <a:schemeClr val="accent1"/>
           </a:solidFill>
-          <a:ln w="9525">
+          <a:ln w="6350">
             <a:solidFill>
-              <a:srgbClr val="C4CBD8"/>
+              <a:schemeClr val="accent1"/>
             </a:solidFill>
             <a:prstDash val="solid"/>
           </a:ln>
@@ -16185,14 +16603,14 @@
       </p:sp>
       <p:sp>
         <p:nvSpPr>
-          <p:cNvPr id="9" name="Stat value"/>
+          <p:cNvPr id="9" name="Text 6"/>
           <p:cNvSpPr txBox="1"/>
           <p:nvPr/>
         </p:nvSpPr>
         <p:spPr>
           <a:xfrm>
-            <a:off x="3527984" y="1801368"/>
-            <a:ext cx="2293544" cy="914400"/>
+            <a:off x="548640" y="2633472"/>
+            <a:ext cx="566928" cy="566928"/>
           </a:xfrm>
           <a:prstGeom prst="rect">
             <a:avLst/>
@@ -16208,30 +16626,30 @@
               <a:buNone/>
             </a:pPr>
             <a:r>
-              <a:rPr lang="en-US" sz="4400" b="1" dirty="0">
-                <a:solidFill>
-                  <a:schemeClr val="tx1"/>
-                </a:solidFill>
-                <a:latin typeface="Cambria" pitchFamily="34" charset="0"/>
-                <a:ea typeface="Cambria" pitchFamily="34" charset="-122"/>
-                <a:cs typeface="Cambria" pitchFamily="34" charset="-120"/>
-              </a:rPr>
-              <a:t>115</a:t>
-            </a:r>
-            <a:endParaRPr lang="en-US" sz="4400" dirty="0"/>
-          </a:p>
-        </p:txBody>
-      </p:sp>
-      <p:sp>
-        <p:nvSpPr>
-          <p:cNvPr id="10" name="Stat label"/>
+              <a:rPr lang="en-US" sz="1500" b="1" dirty="0">
+                <a:solidFill>
+                  <a:schemeClr val="bg1"/>
+                </a:solidFill>
+                <a:latin typeface="Calibri" pitchFamily="34" charset="0"/>
+                <a:ea typeface="Calibri" pitchFamily="34" charset="-122"/>
+                <a:cs typeface="Calibri" pitchFamily="34" charset="-120"/>
+              </a:rPr>
+              <a:t>2</a:t>
+            </a:r>
+            <a:endParaRPr lang="en-US" sz="1500" dirty="0"/>
+          </a:p>
+        </p:txBody>
+      </p:sp>
+      <p:sp>
+        <p:nvSpPr>
+          <p:cNvPr id="10" name="Row text"/>
           <p:cNvSpPr txBox="1"/>
           <p:nvPr/>
         </p:nvSpPr>
         <p:spPr>
           <a:xfrm>
-            <a:off x="3527984" y="2697480"/>
-            <a:ext cx="2293544" cy="612648"/>
+            <a:off x="1325880" y="2587752"/>
+            <a:ext cx="10317175" cy="841248"/>
           </a:xfrm>
           <a:prstGeom prst="rect">
             <a:avLst/>
@@ -16240,46 +16658,44 @@
           <a:ln/>
         </p:spPr>
         <p:txBody>
-          <a:bodyPr wrap="square" lIns="0" tIns="0" rIns="0" bIns="0" rtlCol="0" anchor="t"/>
-          <a:lstStyle/>
-          <a:p>
-            <a:pPr algn="ctr" indent="0" marL="0">
+          <a:bodyPr wrap="square" lIns="0" tIns="0" rIns="0" bIns="0" rtlCol="0" anchor="ctr"/>
+          <a:lstStyle/>
+          <a:p>
+            <a:pPr indent="0" marL="0">
               <a:buNone/>
             </a:pPr>
             <a:r>
-              <a:rPr lang="en-US" sz="1400" dirty="0">
-                <a:solidFill>
-                  <a:schemeClr val="tx2"/>
-                </a:solidFill>
-              </a:rPr>
-              <a:t>workbook checks against the engine, ALL PASS</a:t>
-            </a:r>
-            <a:endParaRPr lang="en-US" sz="1400" dirty="0"/>
-          </a:p>
-        </p:txBody>
-      </p:sp>
-      <p:sp>
-        <p:nvSpPr>
-          <p:cNvPr id="11" name="Stat card"/>
+              <a:rPr lang="en-US" sz="1500" dirty="0">
+                <a:solidFill>
+                  <a:schemeClr val="tx1"/>
+                </a:solidFill>
+              </a:rPr>
+              <a:t>Learning by trial finds the best rule if every decision keeps being tried and the steps shrink at the right pace, but slowly; errors count where the rule goes, and untried decisions, constant steps, and fitted values off the rule's path break it.</a:t>
+            </a:r>
+            <a:endParaRPr lang="en-US" sz="1500" dirty="0"/>
+          </a:p>
+        </p:txBody>
+      </p:sp>
+      <p:sp>
+        <p:nvSpPr>
+          <p:cNvPr id="11" name="Number"/>
           <p:cNvSpPr/>
           <p:nvPr/>
         </p:nvSpPr>
         <p:spPr>
           <a:xfrm>
-            <a:off x="6233008" y="1691640"/>
-            <a:ext cx="2567864" cy="1691640"/>
-          </a:xfrm>
-          <a:prstGeom prst="roundRect">
-            <a:avLst>
-              <a:gd name="adj" fmla="val 4324"/>
-            </a:avLst>
+            <a:off x="548640" y="3529584"/>
+            <a:ext cx="566928" cy="566928"/>
+          </a:xfrm>
+          <a:prstGeom prst="ellipse">
+            <a:avLst/>
           </a:prstGeom>
           <a:solidFill>
-            <a:schemeClr val="bg2"/>
+            <a:schemeClr val="accent1"/>
           </a:solidFill>
-          <a:ln w="9525">
+          <a:ln w="6350">
             <a:solidFill>
-              <a:srgbClr val="C4CBD8"/>
+              <a:schemeClr val="accent1"/>
             </a:solidFill>
             <a:prstDash val="solid"/>
           </a:ln>
@@ -16287,14 +16703,14 @@
       </p:sp>
       <p:sp>
         <p:nvSpPr>
-          <p:cNvPr id="12" name="Stat value"/>
+          <p:cNvPr id="12" name="Text 9"/>
           <p:cNvSpPr txBox="1"/>
           <p:nvPr/>
         </p:nvSpPr>
         <p:spPr>
           <a:xfrm>
-            <a:off x="6370168" y="1801368"/>
-            <a:ext cx="2293544" cy="914400"/>
+            <a:off x="548640" y="3529584"/>
+            <a:ext cx="566928" cy="566928"/>
           </a:xfrm>
           <a:prstGeom prst="rect">
             <a:avLst/>
@@ -16310,30 +16726,30 @@
               <a:buNone/>
             </a:pPr>
             <a:r>
-              <a:rPr lang="en-US" sz="4400" b="1" dirty="0">
-                <a:solidFill>
-                  <a:schemeClr val="tx1"/>
-                </a:solidFill>
-                <a:latin typeface="Cambria" pitchFamily="34" charset="0"/>
-                <a:ea typeface="Cambria" pitchFamily="34" charset="-122"/>
-                <a:cs typeface="Cambria" pitchFamily="34" charset="-120"/>
-              </a:rPr>
-              <a:t>26214</a:t>
-            </a:r>
-            <a:endParaRPr lang="en-US" sz="4400" dirty="0"/>
-          </a:p>
-        </p:txBody>
-      </p:sp>
-      <p:sp>
-        <p:nvSpPr>
-          <p:cNvPr id="13" name="Stat label"/>
+              <a:rPr lang="en-US" sz="1500" b="1" dirty="0">
+                <a:solidFill>
+                  <a:schemeClr val="bg1"/>
+                </a:solidFill>
+                <a:latin typeface="Calibri" pitchFamily="34" charset="0"/>
+                <a:ea typeface="Calibri" pitchFamily="34" charset="-122"/>
+                <a:cs typeface="Calibri" pitchFamily="34" charset="-120"/>
+              </a:rPr>
+              <a:t>3</a:t>
+            </a:r>
+            <a:endParaRPr lang="en-US" sz="1500" dirty="0"/>
+          </a:p>
+        </p:txBody>
+      </p:sp>
+      <p:sp>
+        <p:nvSpPr>
+          <p:cNvPr id="13" name="Row text"/>
           <p:cNvSpPr txBox="1"/>
           <p:nvPr/>
         </p:nvSpPr>
         <p:spPr>
           <a:xfrm>
-            <a:off x="6370168" y="2697480"/>
-            <a:ext cx="2293544" cy="612648"/>
+            <a:off x="1325880" y="3483864"/>
+            <a:ext cx="10317175" cy="841248"/>
           </a:xfrm>
           <a:prstGeom prst="rect">
             <a:avLst/>
@@ -16342,46 +16758,44 @@
           <a:ln/>
         </p:spPr>
         <p:txBody>
-          <a:bodyPr wrap="square" lIns="0" tIns="0" rIns="0" bIns="0" rtlCol="0" anchor="t"/>
-          <a:lstStyle/>
-          <a:p>
-            <a:pPr algn="ctr" indent="0" marL="0">
+          <a:bodyPr wrap="square" lIns="0" tIns="0" rIns="0" bIns="0" rtlCol="0" anchor="ctr"/>
+          <a:lstStyle/>
+          <a:p>
+            <a:pPr indent="0" marL="0">
               <a:buNone/>
             </a:pPr>
             <a:r>
-              <a:rPr lang="en-US" sz="1400" dirty="0">
-                <a:solidFill>
-                  <a:schemeClr val="tx2"/>
-                </a:solidFill>
-              </a:rPr>
-              <a:t>the lab's seed</a:t>
-            </a:r>
-            <a:endParaRPr lang="en-US" sz="1400" dirty="0"/>
-          </a:p>
-        </p:txBody>
-      </p:sp>
-      <p:sp>
-        <p:nvSpPr>
-          <p:cNvPr id="14" name="Stat card"/>
+              <a:rPr lang="en-US" sz="1500" dirty="0">
+                <a:solidFill>
+                  <a:schemeClr val="tx1"/>
+                </a:solidFill>
+              </a:rPr>
+              <a:t>Exploration has a price: greed can lose in proportion to the trials, optimism only in their logarithm, and no learner does better. On the company the price is paid in money.</a:t>
+            </a:r>
+            <a:endParaRPr lang="en-US" sz="1500" dirty="0"/>
+          </a:p>
+        </p:txBody>
+      </p:sp>
+      <p:sp>
+        <p:nvSpPr>
+          <p:cNvPr id="14" name="Number"/>
           <p:cNvSpPr/>
           <p:nvPr/>
         </p:nvSpPr>
         <p:spPr>
           <a:xfrm>
-            <a:off x="9075191" y="1691640"/>
-            <a:ext cx="2567864" cy="1691640"/>
-          </a:xfrm>
-          <a:prstGeom prst="roundRect">
-            <a:avLst>
-              <a:gd name="adj" fmla="val 4324"/>
-            </a:avLst>
+            <a:off x="548640" y="4425696"/>
+            <a:ext cx="566928" cy="566928"/>
+          </a:xfrm>
+          <a:prstGeom prst="ellipse">
+            <a:avLst/>
           </a:prstGeom>
           <a:solidFill>
-            <a:schemeClr val="bg2"/>
+            <a:schemeClr val="accent1"/>
           </a:solidFill>
-          <a:ln w="9525">
+          <a:ln w="6350">
             <a:solidFill>
-              <a:srgbClr val="C4CBD8"/>
+              <a:schemeClr val="accent1"/>
             </a:solidFill>
             <a:prstDash val="solid"/>
           </a:ln>
@@ -16389,14 +16803,14 @@
       </p:sp>
       <p:sp>
         <p:nvSpPr>
-          <p:cNvPr id="15" name="Stat value"/>
+          <p:cNvPr id="15" name="Text 12"/>
           <p:cNvSpPr txBox="1"/>
           <p:nvPr/>
         </p:nvSpPr>
         <p:spPr>
           <a:xfrm>
-            <a:off x="9212351" y="1801368"/>
-            <a:ext cx="2293544" cy="914400"/>
+            <a:off x="548640" y="4425696"/>
+            <a:ext cx="566928" cy="566928"/>
           </a:xfrm>
           <a:prstGeom prst="rect">
             <a:avLst/>
@@ -16412,30 +16826,30 @@
               <a:buNone/>
             </a:pPr>
             <a:r>
-              <a:rPr lang="en-US" sz="3000" b="1" dirty="0">
-                <a:solidFill>
-                  <a:schemeClr val="tx1"/>
-                </a:solidFill>
-                <a:latin typeface="Cambria" pitchFamily="34" charset="0"/>
-                <a:ea typeface="Cambria" pitchFamily="34" charset="-122"/>
-                <a:cs typeface="Cambria" pitchFamily="34" charset="-120"/>
-              </a:rPr>
-              <a:t>AXIOM-14</a:t>
-            </a:r>
-            <a:endParaRPr lang="en-US" sz="3000" dirty="0"/>
-          </a:p>
-        </p:txBody>
-      </p:sp>
-      <p:sp>
-        <p:nvSpPr>
-          <p:cNvPr id="16" name="Stat label"/>
+              <a:rPr lang="en-US" sz="1500" b="1" dirty="0">
+                <a:solidFill>
+                  <a:schemeClr val="bg1"/>
+                </a:solidFill>
+                <a:latin typeface="Calibri" pitchFamily="34" charset="0"/>
+                <a:ea typeface="Calibri" pitchFamily="34" charset="-122"/>
+                <a:cs typeface="Calibri" pitchFamily="34" charset="-120"/>
+              </a:rPr>
+              <a:t>4</a:t>
+            </a:r>
+            <a:endParaRPr lang="en-US" sz="1500" dirty="0"/>
+          </a:p>
+        </p:txBody>
+      </p:sp>
+      <p:sp>
+        <p:nvSpPr>
+          <p:cNvPr id="16" name="Row text"/>
           <p:cNvSpPr txBox="1"/>
           <p:nvPr/>
         </p:nvSpPr>
         <p:spPr>
           <a:xfrm>
-            <a:off x="9212351" y="2697480"/>
-            <a:ext cx="2293544" cy="612648"/>
+            <a:off x="1325880" y="4379976"/>
+            <a:ext cx="10317175" cy="841248"/>
           </a:xfrm>
           <a:prstGeom prst="rect">
             <a:avLst/>
@@ -16444,34 +16858,98 @@
           <a:ln/>
         </p:spPr>
         <p:txBody>
-          <a:bodyPr wrap="square" lIns="0" tIns="0" rIns="0" bIns="0" rtlCol="0" anchor="t"/>
+          <a:bodyPr wrap="square" lIns="0" tIns="0" rIns="0" bIns="0" rtlCol="0" anchor="ctr"/>
+          <a:lstStyle/>
+          <a:p>
+            <a:pPr indent="0" marL="0">
+              <a:buNone/>
+            </a:pPr>
+            <a:r>
+              <a:rPr lang="en-US" sz="1500" dirty="0">
+                <a:solidFill>
+                  <a:schemeClr val="tx1"/>
+                </a:solidFill>
+              </a:rPr>
+              <a:t>A simulator learned from records of the outside events makes trials cheap and improves as the record grows; a record kept under one rule cannot reveal what other decisions do.</a:t>
+            </a:r>
+            <a:endParaRPr lang="en-US" sz="1500" dirty="0"/>
+          </a:p>
+        </p:txBody>
+      </p:sp>
+      <p:sp>
+        <p:nvSpPr>
+          <p:cNvPr id="17" name="Number"/>
+          <p:cNvSpPr/>
+          <p:nvPr/>
+        </p:nvSpPr>
+        <p:spPr>
+          <a:xfrm>
+            <a:off x="548640" y="5321808"/>
+            <a:ext cx="566928" cy="566928"/>
+          </a:xfrm>
+          <a:prstGeom prst="ellipse">
+            <a:avLst/>
+          </a:prstGeom>
+          <a:solidFill>
+            <a:schemeClr val="accent1"/>
+          </a:solidFill>
+          <a:ln w="6350">
+            <a:solidFill>
+              <a:schemeClr val="accent1"/>
+            </a:solidFill>
+            <a:prstDash val="solid"/>
+          </a:ln>
+        </p:spPr>
+      </p:sp>
+      <p:sp>
+        <p:nvSpPr>
+          <p:cNvPr id="18" name="Text 15"/>
+          <p:cNvSpPr txBox="1"/>
+          <p:nvPr/>
+        </p:nvSpPr>
+        <p:spPr>
+          <a:xfrm>
+            <a:off x="548640" y="5321808"/>
+            <a:ext cx="566928" cy="566928"/>
+          </a:xfrm>
+          <a:prstGeom prst="rect">
+            <a:avLst/>
+          </a:prstGeom>
+          <a:noFill/>
+          <a:ln/>
+        </p:spPr>
+        <p:txBody>
+          <a:bodyPr wrap="square" lIns="0" tIns="0" rIns="0" bIns="0" rtlCol="0" anchor="ctr"/>
           <a:lstStyle/>
           <a:p>
             <a:pPr algn="ctr" indent="0" marL="0">
               <a:buNone/>
             </a:pPr>
             <a:r>
-              <a:rPr lang="en-US" sz="1400" dirty="0">
-                <a:solidFill>
-                  <a:schemeClr val="tx2"/>
-                </a:solidFill>
-              </a:rPr>
-              <a:t>AXIOM Lab 2.14</a:t>
-            </a:r>
-            <a:endParaRPr lang="en-US" sz="1400" dirty="0"/>
-          </a:p>
-        </p:txBody>
-      </p:sp>
-      <p:sp>
-        <p:nvSpPr>
-          <p:cNvPr id="17" name="Bullets"/>
+              <a:rPr lang="en-US" sz="1500" b="1" dirty="0">
+                <a:solidFill>
+                  <a:schemeClr val="bg1"/>
+                </a:solidFill>
+                <a:latin typeface="Calibri" pitchFamily="34" charset="0"/>
+                <a:ea typeface="Calibri" pitchFamily="34" charset="-122"/>
+                <a:cs typeface="Calibri" pitchFamily="34" charset="-120"/>
+              </a:rPr>
+              <a:t>5</a:t>
+            </a:r>
+            <a:endParaRPr lang="en-US" sz="1500" dirty="0"/>
+          </a:p>
+        </p:txBody>
+      </p:sp>
+      <p:sp>
+        <p:nvSpPr>
+          <p:cNvPr id="19" name="Row text"/>
           <p:cNvSpPr txBox="1"/>
           <p:nvPr/>
         </p:nvSpPr>
         <p:spPr>
           <a:xfrm>
-            <a:off x="548640" y="3703320"/>
-            <a:ext cx="11094415" cy="2468880"/>
+            <a:off x="1325880" y="5276088"/>
+            <a:ext cx="10317175" cy="841248"/>
           </a:xfrm>
           <a:prstGeom prst="rect">
             <a:avLst/>
@@ -16480,59 +16958,21 @@
           <a:ln/>
         </p:spPr>
         <p:txBody>
-          <a:bodyPr wrap="square" lIns="635" tIns="635" rIns="635" bIns="635" rtlCol="0" anchor="t"/>
-          <a:lstStyle/>
-          <a:p>
-            <a:pPr marL="228600" indent="-228600">
-              <a:spcAft>
-                <a:spcPts val="800"/>
-              </a:spcAft>
-              <a:buSzPct val="100000"/>
-              <a:buChar char="•"/>
-            </a:pPr>
-            <a:r>
-              <a:rPr lang="en-US" sz="1700" b="1" dirty="0">
-                <a:solidFill>
-                  <a:schemeClr val="tx1"/>
-                </a:solidFill>
-              </a:rPr>
-              <a:t>Notebook</a:t>
-            </a:r>
-            <a:r>
-              <a:rPr lang="en-US" sz="1700" dirty="0">
-                <a:solidFill>
-                  <a:schemeClr val="tx1"/>
-                </a:solidFill>
-              </a:rPr>
-              <a:t> DCT_V2_Ch14_Lab.ipynb: Worked Example 14.1 and the lab's five steps in eight panels, with the book's seeds, ready for Colab</a:t>
-            </a:r>
-            <a:endParaRPr lang="en-US" sz="1700" dirty="0"/>
-          </a:p>
-          <a:p>
-            <a:pPr marL="228600" indent="-228600">
-              <a:spcAft>
-                <a:spcPts val="800"/>
-              </a:spcAft>
-              <a:buSzPct val="100000"/>
-              <a:buChar char="•"/>
-            </a:pPr>
-            <a:r>
-              <a:rPr lang="en-US" sz="1700" b="1" dirty="0">
-                <a:solidFill>
-                  <a:schemeClr val="tx1"/>
-                </a:solidFill>
-              </a:rPr>
-              <a:t>Workbook</a:t>
-            </a:r>
-            <a:r>
-              <a:rPr lang="en-US" sz="1700" dirty="0">
-                <a:solidFill>
-                  <a:schemeClr val="tx1"/>
-                </a:solidFill>
-              </a:rPr>
-              <a:t> DCT_V2_Ch14_Lab.xlsx: the grid and the guardrail, one Bellman step at 201 levels, the learners' summaries, the regret decomposition and Table 14.3, in formulas</a:t>
-            </a:r>
-            <a:endParaRPr lang="en-US" sz="1700" dirty="0"/>
+          <a:bodyPr wrap="square" lIns="0" tIns="0" rIns="0" bIns="0" rtlCol="0" anchor="ctr"/>
+          <a:lstStyle/>
+          <a:p>
+            <a:pPr indent="0" marL="0">
+              <a:buNone/>
+            </a:pPr>
+            <a:r>
+              <a:rPr lang="en-US" sz="1500" dirty="0">
+                <a:solidFill>
+                  <a:schemeClr val="tx1"/>
+                </a:solidFill>
+              </a:rPr>
+              <a:t>A guardrail that holds a best rule costs nothing and caps the damage; every proposal is certified under the declared model, and many agents are coordinated by a price. Meridian's agent would lose $545.5 million learning on the company, and $1.2 million inside the guardrail.</a:t>
+            </a:r>
+            <a:endParaRPr lang="en-US" sz="1500" dirty="0"/>
           </a:p>
         </p:txBody>
       </p:sp>
@@ -16638,6 +17078,637 @@
                   <a:schemeClr val="accent1"/>
                 </a:solidFill>
               </a:rPr>
+              <a:t>THIS WEEK'S LABORATORY</a:t>
+            </a:r>
+            <a:endParaRPr lang="en-US" sz="1200" dirty="0"/>
+          </a:p>
+        </p:txBody>
+      </p:sp>
+      <p:sp>
+        <p:nvSpPr>
+          <p:cNvPr id="4" name="Text 1"/>
+          <p:cNvSpPr/>
+          <p:nvPr>
+            <p:ph idx="103" type="title" hasCustomPrompt="1"/>
+          </p:nvPr>
+        </p:nvSpPr>
+        <p:spPr>
+          <a:xfrm>
+            <a:off x="548640" y="658368"/>
+            <a:ext cx="11094415" cy="868680"/>
+          </a:xfrm>
+          <a:prstGeom prst="rect">
+            <a:avLst/>
+          </a:prstGeom>
+          <a:noFill/>
+          <a:ln/>
+        </p:spPr>
+        <p:txBody>
+          <a:bodyPr wrap="square" lIns="0" tIns="0" rIns="0" bIns="0" rtlCol="0" anchor="t"/>
+          <a:lstStyle/>
+          <a:p>
+            <a:pPr algn="l" indent="0" marL="0">
+              <a:buNone/>
+            </a:pPr>
+            <a:r>
+              <a:rPr lang="en-US" sz="3200" b="1" dirty="0">
+                <a:solidFill>
+                  <a:schemeClr val="tx1"/>
+                </a:solidFill>
+                <a:latin typeface="Cambria" pitchFamily="34" charset="0"/>
+                <a:ea typeface="Cambria" pitchFamily="34" charset="-122"/>
+                <a:cs typeface="Cambria" pitchFamily="34" charset="-120"/>
+              </a:rPr>
+              <a:t>Notebook and workbook reproduce the book</a:t>
+            </a:r>
+            <a:endParaRPr lang="en-US" sz="3200" dirty="0"/>
+          </a:p>
+        </p:txBody>
+      </p:sp>
+      <p:sp>
+        <p:nvSpPr>
+          <p:cNvPr id="5" name="Stat card"/>
+          <p:cNvSpPr/>
+          <p:nvPr/>
+        </p:nvSpPr>
+        <p:spPr>
+          <a:xfrm>
+            <a:off x="548640" y="1691640"/>
+            <a:ext cx="2567864" cy="1691640"/>
+          </a:xfrm>
+          <a:prstGeom prst="roundRect">
+            <a:avLst>
+              <a:gd name="adj" fmla="val 4324"/>
+            </a:avLst>
+          </a:prstGeom>
+          <a:solidFill>
+            <a:schemeClr val="tx1"/>
+          </a:solidFill>
+          <a:ln w="9525">
+            <a:solidFill>
+              <a:srgbClr val="0F1E3D"/>
+            </a:solidFill>
+            <a:prstDash val="solid"/>
+          </a:ln>
+        </p:spPr>
+      </p:sp>
+      <p:sp>
+        <p:nvSpPr>
+          <p:cNvPr id="6" name="Stat value"/>
+          <p:cNvSpPr txBox="1"/>
+          <p:nvPr/>
+        </p:nvSpPr>
+        <p:spPr>
+          <a:xfrm>
+            <a:off x="685800" y="1801368"/>
+            <a:ext cx="2293544" cy="914400"/>
+          </a:xfrm>
+          <a:prstGeom prst="rect">
+            <a:avLst/>
+          </a:prstGeom>
+          <a:noFill/>
+          <a:ln/>
+        </p:spPr>
+        <p:txBody>
+          <a:bodyPr wrap="square" lIns="0" tIns="0" rIns="0" bIns="0" rtlCol="0" anchor="ctr"/>
+          <a:lstStyle/>
+          <a:p>
+            <a:pPr algn="ctr" indent="0" marL="0">
+              <a:buNone/>
+            </a:pPr>
+            <a:r>
+              <a:rPr lang="en-US" sz="4400" b="1" dirty="0">
+                <a:solidFill>
+                  <a:schemeClr val="accent1"/>
+                </a:solidFill>
+                <a:latin typeface="Cambria" pitchFamily="34" charset="0"/>
+                <a:ea typeface="Cambria" pitchFamily="34" charset="-122"/>
+                <a:cs typeface="Cambria" pitchFamily="34" charset="-120"/>
+              </a:rPr>
+              <a:t>211</a:t>
+            </a:r>
+            <a:endParaRPr lang="en-US" sz="4400" dirty="0"/>
+          </a:p>
+        </p:txBody>
+      </p:sp>
+      <p:sp>
+        <p:nvSpPr>
+          <p:cNvPr id="7" name="Stat label"/>
+          <p:cNvSpPr txBox="1"/>
+          <p:nvPr/>
+        </p:nvSpPr>
+        <p:spPr>
+          <a:xfrm>
+            <a:off x="685800" y="2697480"/>
+            <a:ext cx="2293544" cy="612648"/>
+          </a:xfrm>
+          <a:prstGeom prst="rect">
+            <a:avLst/>
+          </a:prstGeom>
+          <a:noFill/>
+          <a:ln/>
+        </p:spPr>
+        <p:txBody>
+          <a:bodyPr wrap="square" lIns="0" tIns="0" rIns="0" bIns="0" rtlCol="0" anchor="t"/>
+          <a:lstStyle/>
+          <a:p>
+            <a:pPr algn="ctr" indent="0" marL="0">
+              <a:buNone/>
+            </a:pPr>
+            <a:r>
+              <a:rPr lang="en-US" sz="1400" dirty="0">
+                <a:solidFill>
+                  <a:schemeClr val="bg2"/>
+                </a:solidFill>
+              </a:rPr>
+              <a:t>notebook checkpoints, every one PASS</a:t>
+            </a:r>
+            <a:endParaRPr lang="en-US" sz="1400" dirty="0"/>
+          </a:p>
+        </p:txBody>
+      </p:sp>
+      <p:sp>
+        <p:nvSpPr>
+          <p:cNvPr id="8" name="Stat card"/>
+          <p:cNvSpPr/>
+          <p:nvPr/>
+        </p:nvSpPr>
+        <p:spPr>
+          <a:xfrm>
+            <a:off x="3390824" y="1691640"/>
+            <a:ext cx="2567864" cy="1691640"/>
+          </a:xfrm>
+          <a:prstGeom prst="roundRect">
+            <a:avLst>
+              <a:gd name="adj" fmla="val 4324"/>
+            </a:avLst>
+          </a:prstGeom>
+          <a:solidFill>
+            <a:schemeClr val="bg2"/>
+          </a:solidFill>
+          <a:ln w="9525">
+            <a:solidFill>
+              <a:srgbClr val="C4CBD8"/>
+            </a:solidFill>
+            <a:prstDash val="solid"/>
+          </a:ln>
+        </p:spPr>
+      </p:sp>
+      <p:sp>
+        <p:nvSpPr>
+          <p:cNvPr id="9" name="Stat value"/>
+          <p:cNvSpPr txBox="1"/>
+          <p:nvPr/>
+        </p:nvSpPr>
+        <p:spPr>
+          <a:xfrm>
+            <a:off x="3527984" y="1801368"/>
+            <a:ext cx="2293544" cy="914400"/>
+          </a:xfrm>
+          <a:prstGeom prst="rect">
+            <a:avLst/>
+          </a:prstGeom>
+          <a:noFill/>
+          <a:ln/>
+        </p:spPr>
+        <p:txBody>
+          <a:bodyPr wrap="square" lIns="0" tIns="0" rIns="0" bIns="0" rtlCol="0" anchor="ctr"/>
+          <a:lstStyle/>
+          <a:p>
+            <a:pPr algn="ctr" indent="0" marL="0">
+              <a:buNone/>
+            </a:pPr>
+            <a:r>
+              <a:rPr lang="en-US" sz="4400" b="1" dirty="0">
+                <a:solidFill>
+                  <a:schemeClr val="tx1"/>
+                </a:solidFill>
+                <a:latin typeface="Cambria" pitchFamily="34" charset="0"/>
+                <a:ea typeface="Cambria" pitchFamily="34" charset="-122"/>
+                <a:cs typeface="Cambria" pitchFamily="34" charset="-120"/>
+              </a:rPr>
+              <a:t>115</a:t>
+            </a:r>
+            <a:endParaRPr lang="en-US" sz="4400" dirty="0"/>
+          </a:p>
+        </p:txBody>
+      </p:sp>
+      <p:sp>
+        <p:nvSpPr>
+          <p:cNvPr id="10" name="Stat label"/>
+          <p:cNvSpPr txBox="1"/>
+          <p:nvPr/>
+        </p:nvSpPr>
+        <p:spPr>
+          <a:xfrm>
+            <a:off x="3527984" y="2697480"/>
+            <a:ext cx="2293544" cy="612648"/>
+          </a:xfrm>
+          <a:prstGeom prst="rect">
+            <a:avLst/>
+          </a:prstGeom>
+          <a:noFill/>
+          <a:ln/>
+        </p:spPr>
+        <p:txBody>
+          <a:bodyPr wrap="square" lIns="0" tIns="0" rIns="0" bIns="0" rtlCol="0" anchor="t"/>
+          <a:lstStyle/>
+          <a:p>
+            <a:pPr algn="ctr" indent="0" marL="0">
+              <a:buNone/>
+            </a:pPr>
+            <a:r>
+              <a:rPr lang="en-US" sz="1400" dirty="0">
+                <a:solidFill>
+                  <a:schemeClr val="tx2"/>
+                </a:solidFill>
+              </a:rPr>
+              <a:t>workbook checks against the engine, ALL PASS</a:t>
+            </a:r>
+            <a:endParaRPr lang="en-US" sz="1400" dirty="0"/>
+          </a:p>
+        </p:txBody>
+      </p:sp>
+      <p:sp>
+        <p:nvSpPr>
+          <p:cNvPr id="11" name="Stat card"/>
+          <p:cNvSpPr/>
+          <p:nvPr/>
+        </p:nvSpPr>
+        <p:spPr>
+          <a:xfrm>
+            <a:off x="6233008" y="1691640"/>
+            <a:ext cx="2567864" cy="1691640"/>
+          </a:xfrm>
+          <a:prstGeom prst="roundRect">
+            <a:avLst>
+              <a:gd name="adj" fmla="val 4324"/>
+            </a:avLst>
+          </a:prstGeom>
+          <a:solidFill>
+            <a:schemeClr val="bg2"/>
+          </a:solidFill>
+          <a:ln w="9525">
+            <a:solidFill>
+              <a:srgbClr val="C4CBD8"/>
+            </a:solidFill>
+            <a:prstDash val="solid"/>
+          </a:ln>
+        </p:spPr>
+      </p:sp>
+      <p:sp>
+        <p:nvSpPr>
+          <p:cNvPr id="12" name="Stat value"/>
+          <p:cNvSpPr txBox="1"/>
+          <p:nvPr/>
+        </p:nvSpPr>
+        <p:spPr>
+          <a:xfrm>
+            <a:off x="6370168" y="1801368"/>
+            <a:ext cx="2293544" cy="914400"/>
+          </a:xfrm>
+          <a:prstGeom prst="rect">
+            <a:avLst/>
+          </a:prstGeom>
+          <a:noFill/>
+          <a:ln/>
+        </p:spPr>
+        <p:txBody>
+          <a:bodyPr wrap="square" lIns="0" tIns="0" rIns="0" bIns="0" rtlCol="0" anchor="ctr"/>
+          <a:lstStyle/>
+          <a:p>
+            <a:pPr algn="ctr" indent="0" marL="0">
+              <a:buNone/>
+            </a:pPr>
+            <a:r>
+              <a:rPr lang="en-US" sz="4400" b="1" dirty="0">
+                <a:solidFill>
+                  <a:schemeClr val="tx1"/>
+                </a:solidFill>
+                <a:latin typeface="Cambria" pitchFamily="34" charset="0"/>
+                <a:ea typeface="Cambria" pitchFamily="34" charset="-122"/>
+                <a:cs typeface="Cambria" pitchFamily="34" charset="-120"/>
+              </a:rPr>
+              <a:t>26214</a:t>
+            </a:r>
+            <a:endParaRPr lang="en-US" sz="4400" dirty="0"/>
+          </a:p>
+        </p:txBody>
+      </p:sp>
+      <p:sp>
+        <p:nvSpPr>
+          <p:cNvPr id="13" name="Stat label"/>
+          <p:cNvSpPr txBox="1"/>
+          <p:nvPr/>
+        </p:nvSpPr>
+        <p:spPr>
+          <a:xfrm>
+            <a:off x="6370168" y="2697480"/>
+            <a:ext cx="2293544" cy="612648"/>
+          </a:xfrm>
+          <a:prstGeom prst="rect">
+            <a:avLst/>
+          </a:prstGeom>
+          <a:noFill/>
+          <a:ln/>
+        </p:spPr>
+        <p:txBody>
+          <a:bodyPr wrap="square" lIns="0" tIns="0" rIns="0" bIns="0" rtlCol="0" anchor="t"/>
+          <a:lstStyle/>
+          <a:p>
+            <a:pPr algn="ctr" indent="0" marL="0">
+              <a:buNone/>
+            </a:pPr>
+            <a:r>
+              <a:rPr lang="en-US" sz="1400" dirty="0">
+                <a:solidFill>
+                  <a:schemeClr val="tx2"/>
+                </a:solidFill>
+              </a:rPr>
+              <a:t>the lab's seed</a:t>
+            </a:r>
+            <a:endParaRPr lang="en-US" sz="1400" dirty="0"/>
+          </a:p>
+        </p:txBody>
+      </p:sp>
+      <p:sp>
+        <p:nvSpPr>
+          <p:cNvPr id="14" name="Stat card"/>
+          <p:cNvSpPr/>
+          <p:nvPr/>
+        </p:nvSpPr>
+        <p:spPr>
+          <a:xfrm>
+            <a:off x="9075191" y="1691640"/>
+            <a:ext cx="2567864" cy="1691640"/>
+          </a:xfrm>
+          <a:prstGeom prst="roundRect">
+            <a:avLst>
+              <a:gd name="adj" fmla="val 4324"/>
+            </a:avLst>
+          </a:prstGeom>
+          <a:solidFill>
+            <a:schemeClr val="bg2"/>
+          </a:solidFill>
+          <a:ln w="9525">
+            <a:solidFill>
+              <a:srgbClr val="C4CBD8"/>
+            </a:solidFill>
+            <a:prstDash val="solid"/>
+          </a:ln>
+        </p:spPr>
+      </p:sp>
+      <p:sp>
+        <p:nvSpPr>
+          <p:cNvPr id="15" name="Stat value"/>
+          <p:cNvSpPr txBox="1"/>
+          <p:nvPr/>
+        </p:nvSpPr>
+        <p:spPr>
+          <a:xfrm>
+            <a:off x="9212351" y="1801368"/>
+            <a:ext cx="2293544" cy="914400"/>
+          </a:xfrm>
+          <a:prstGeom prst="rect">
+            <a:avLst/>
+          </a:prstGeom>
+          <a:noFill/>
+          <a:ln/>
+        </p:spPr>
+        <p:txBody>
+          <a:bodyPr wrap="square" lIns="0" tIns="0" rIns="0" bIns="0" rtlCol="0" anchor="ctr"/>
+          <a:lstStyle/>
+          <a:p>
+            <a:pPr algn="ctr" indent="0" marL="0">
+              <a:buNone/>
+            </a:pPr>
+            <a:r>
+              <a:rPr lang="en-US" sz="3000" b="1" dirty="0">
+                <a:solidFill>
+                  <a:schemeClr val="tx1"/>
+                </a:solidFill>
+                <a:latin typeface="Cambria" pitchFamily="34" charset="0"/>
+                <a:ea typeface="Cambria" pitchFamily="34" charset="-122"/>
+                <a:cs typeface="Cambria" pitchFamily="34" charset="-120"/>
+              </a:rPr>
+              <a:t>AXIOM-14</a:t>
+            </a:r>
+            <a:endParaRPr lang="en-US" sz="3000" dirty="0"/>
+          </a:p>
+        </p:txBody>
+      </p:sp>
+      <p:sp>
+        <p:nvSpPr>
+          <p:cNvPr id="16" name="Stat label"/>
+          <p:cNvSpPr txBox="1"/>
+          <p:nvPr/>
+        </p:nvSpPr>
+        <p:spPr>
+          <a:xfrm>
+            <a:off x="9212351" y="2697480"/>
+            <a:ext cx="2293544" cy="612648"/>
+          </a:xfrm>
+          <a:prstGeom prst="rect">
+            <a:avLst/>
+          </a:prstGeom>
+          <a:noFill/>
+          <a:ln/>
+        </p:spPr>
+        <p:txBody>
+          <a:bodyPr wrap="square" lIns="0" tIns="0" rIns="0" bIns="0" rtlCol="0" anchor="t"/>
+          <a:lstStyle/>
+          <a:p>
+            <a:pPr algn="ctr" indent="0" marL="0">
+              <a:buNone/>
+            </a:pPr>
+            <a:r>
+              <a:rPr lang="en-US" sz="1400" dirty="0">
+                <a:solidFill>
+                  <a:schemeClr val="tx2"/>
+                </a:solidFill>
+              </a:rPr>
+              <a:t>AXIOM Lab 2.14</a:t>
+            </a:r>
+            <a:endParaRPr lang="en-US" sz="1400" dirty="0"/>
+          </a:p>
+        </p:txBody>
+      </p:sp>
+      <p:sp>
+        <p:nvSpPr>
+          <p:cNvPr id="17" name="Bullets"/>
+          <p:cNvSpPr txBox="1"/>
+          <p:nvPr/>
+        </p:nvSpPr>
+        <p:spPr>
+          <a:xfrm>
+            <a:off x="548640" y="3703320"/>
+            <a:ext cx="11094415" cy="2468880"/>
+          </a:xfrm>
+          <a:prstGeom prst="rect">
+            <a:avLst/>
+          </a:prstGeom>
+          <a:noFill/>
+          <a:ln/>
+        </p:spPr>
+        <p:txBody>
+          <a:bodyPr wrap="square" lIns="635" tIns="635" rIns="635" bIns="635" rtlCol="0" anchor="t"/>
+          <a:lstStyle/>
+          <a:p>
+            <a:pPr marL="228600" indent="-228600">
+              <a:spcAft>
+                <a:spcPts val="800"/>
+              </a:spcAft>
+              <a:buSzPct val="100000"/>
+              <a:buChar char="•"/>
+            </a:pPr>
+            <a:r>
+              <a:rPr lang="en-US" sz="1700" b="1" dirty="0">
+                <a:solidFill>
+                  <a:schemeClr val="tx1"/>
+                </a:solidFill>
+              </a:rPr>
+              <a:t>Notebook</a:t>
+            </a:r>
+            <a:r>
+              <a:rPr lang="en-US" sz="1700" dirty="0">
+                <a:solidFill>
+                  <a:schemeClr val="tx1"/>
+                </a:solidFill>
+              </a:rPr>
+              <a:t> DCT_V2_Ch14_Lab.ipynb: Worked Example 14.1 and the lab's five steps in eight panels, with the book's seeds, ready for Colab</a:t>
+            </a:r>
+            <a:endParaRPr lang="en-US" sz="1700" dirty="0"/>
+          </a:p>
+          <a:p>
+            <a:pPr marL="228600" indent="-228600">
+              <a:spcAft>
+                <a:spcPts val="800"/>
+              </a:spcAft>
+              <a:buSzPct val="100000"/>
+              <a:buChar char="•"/>
+            </a:pPr>
+            <a:r>
+              <a:rPr lang="en-US" sz="1700" b="1" dirty="0">
+                <a:solidFill>
+                  <a:schemeClr val="tx1"/>
+                </a:solidFill>
+              </a:rPr>
+              <a:t>Workbook</a:t>
+            </a:r>
+            <a:r>
+              <a:rPr lang="en-US" sz="1700" dirty="0">
+                <a:solidFill>
+                  <a:schemeClr val="tx1"/>
+                </a:solidFill>
+              </a:rPr>
+              <a:t> DCT_V2_Ch14_Lab.xlsx: the grid and the guardrail, one Bellman step at 201 levels, the learners' summaries, the regret decomposition and Table 14.3, in formulas</a:t>
+            </a:r>
+            <a:endParaRPr lang="en-US" sz="1700" dirty="0"/>
+          </a:p>
+        </p:txBody>
+      </p:sp>
+      <p:sp>
+        <p:nvSpPr>
+          <p:cNvPr id="25" name="Slide Number Placeholder 0"/>
+          <p:cNvSpPr>
+            <a:spLocks noGrp="1"/>
+          </p:cNvSpPr>
+          <p:nvPr>
+            <p:ph type="sldNum" sz="quarter" idx="4294967295"/>
+          </p:nvPr>
+        </p:nvSpPr>
+        <p:spPr>
+          <a:xfrm>
+            <a:off x="11094415" y="6382512"/>
+            <a:ext cx="548640" cy="237744"/>
+          </a:xfrm>
+          <a:prstGeom prst="rect">
+            <a:avLst/>
+          </a:prstGeom>
+          <a:extLst>
+            <a:ext uri="{C572A759-6A51-4108-AA02-DFA0A04FC94B}">
+              <ma14:wrappingTextBoxFlag xmlns:ma14="http://schemas.microsoft.com/office/mac/drawingml/2011/main" val="0"/>
+            </a:ext>
+          </a:extLst>
+        </p:spPr>
+        <p:txBody>
+          <a:bodyPr/>
+          <a:lstStyle>
+            <a:lvl1pPr>
+              <a:defRPr sz="1000">
+                <a:solidFill>
+                  <a:srgbClr val="5A6B82"/>
+                </a:solidFill>
+              </a:defRPr>
+            </a:lvl1pPr>
+          </a:lstStyle>
+          <a:p>
+            <a:pPr algn="r"/>
+            <a:fld id="{F7021451-1387-4CA6-816F-3879F97B5CBC}" type="slidenum">
+              <a:rPr b="0" lang="en-US"/>
+              <a:t>23</a:t>
+            </a:fld>
+            <a:endParaRPr lang="en-US"/>
+          </a:p>
+        </p:txBody>
+      </p:sp>
+    </p:spTree>
+  </p:cSld>
+  <p:clrMapOvr>
+    <a:masterClrMapping/>
+  </p:clrMapOvr>
+</p:sld>
+</file>
+
+<file path=ppt/slides/slide24.xml><?xml version="1.0" encoding="utf-8"?>
+<p:sld xmlns:a="http://schemas.openxmlformats.org/drawingml/2006/main" xmlns:r="http://schemas.openxmlformats.org/officeDocument/2006/relationships" xmlns:p="http://schemas.openxmlformats.org/presentationml/2006/main">
+  <p:cSld name="Slide 24">
+    <p:spTree>
+      <p:nvGrpSpPr>
+        <p:cNvPr id="1" name=""/>
+        <p:cNvGrpSpPr/>
+        <p:nvPr/>
+      </p:nvGrpSpPr>
+      <p:grpSpPr>
+        <a:xfrm>
+          <a:off x="0" y="0"/>
+          <a:ext cx="0" cy="0"/>
+          <a:chOff x="0" y="0"/>
+          <a:chExt cx="0" cy="0"/>
+        </a:xfrm>
+      </p:grpSpPr>
+      <p:sp>
+        <p:nvSpPr>
+          <p:cNvPr id="3" name="Text 1"/>
+          <p:cNvSpPr/>
+          <p:nvPr>
+            <p:ph idx="102" type="body" hasCustomPrompt="1"/>
+          </p:nvPr>
+        </p:nvSpPr>
+        <p:spPr>
+          <a:xfrm>
+            <a:off x="548640" y="347472"/>
+            <a:ext cx="11094415" cy="292608"/>
+          </a:xfrm>
+          <a:prstGeom prst="rect">
+            <a:avLst/>
+          </a:prstGeom>
+          <a:noFill/>
+          <a:ln/>
+        </p:spPr>
+        <p:txBody>
+          <a:bodyPr wrap="square" lIns="0" tIns="0" rIns="0" bIns="0" rtlCol="0"/>
+          <a:lstStyle/>
+          <a:p>
+            <a:pPr indent="0" marL="0">
+              <a:buNone/>
+            </a:pPr>
+            <a:r>
+              <a:rPr lang="en-US" sz="1200" b="1" spc="200" kern="0" dirty="0">
+                <a:solidFill>
+                  <a:schemeClr val="accent1"/>
+                </a:solidFill>
+              </a:rPr>
               <a:t>NEXT · CHAPTER 15</a:t>
             </a:r>
             <a:endParaRPr lang="en-US" sz="1200" dirty="0"/>
@@ -16824,7 +17895,7 @@
             <a:pPr algn="r"/>
             <a:fld id="{F7021451-1387-4CA6-816F-3879F97B5CBC}" type="slidenum">
               <a:rPr b="0" lang="en-US"/>
-              <a:t>23</a:t>
+              <a:t>24</a:t>
             </a:fld>
             <a:endParaRPr lang="en-US"/>
           </a:p>
@@ -17577,7 +18648,7 @@
                 <a:ea typeface="Cambria" pitchFamily="34" charset="-122"/>
                 <a:cs typeface="Cambria" pitchFamily="34" charset="-120"/>
               </a:rPr>
-              <a:t>Five sections, a worked example and a lab</a:t>
+              <a:t>Five sections, a worked example, a case and a lab</a:t>
             </a:r>
             <a:endParaRPr lang="en-US" sz="3200" dirty="0"/>
           </a:p>
@@ -18468,7 +19539,7 @@
                   <a:schemeClr val="accent1"/>
                 </a:solidFill>
               </a:rPr>
-              <a:t>AXIOM Lab 2.14</a:t>
+              <a:t>In Practice</a:t>
             </a:r>
             <a:endParaRPr lang="en-US" sz="1300" dirty="0"/>
           </a:p>
@@ -18507,7 +19578,7 @@
                 <a:ea typeface="Cambria" pitchFamily="34" charset="-122"/>
                 <a:cs typeface="Cambria" pitchFamily="34" charset="-120"/>
               </a:rPr>
-              <a:t>Learning a Rule by Trial: Simulators, Exploration, and Guardrails</a:t>
+              <a:t>Google Hands Its Cooling to an Agent</a:t>
             </a:r>
             <a:endParaRPr lang="en-US" sz="1500" dirty="0"/>
           </a:p>
@@ -18522,6 +19593,144 @@
         <p:spPr>
           <a:xfrm>
             <a:off x="6415888" y="5660136"/>
+            <a:ext cx="2202104" cy="384048"/>
+          </a:xfrm>
+          <a:prstGeom prst="rect">
+            <a:avLst/>
+          </a:prstGeom>
+          <a:noFill/>
+          <a:ln/>
+        </p:spPr>
+        <p:txBody>
+          <a:bodyPr wrap="square" lIns="0" tIns="0" rIns="0" bIns="0" rtlCol="0" anchor="t"/>
+          <a:lstStyle/>
+          <a:p>
+            <a:pPr indent="0" marL="0">
+              <a:buNone/>
+            </a:pPr>
+            <a:r>
+              <a:rPr lang="en-US" sz="1300" dirty="0">
+                <a:solidFill>
+                  <a:schemeClr val="tx2"/>
+                </a:solidFill>
+              </a:rPr>
+              <a:t>At a Glance · board questions</a:t>
+            </a:r>
+            <a:endParaRPr lang="en-US" sz="1300" dirty="0"/>
+          </a:p>
+        </p:txBody>
+      </p:sp>
+      <p:sp>
+        <p:nvSpPr>
+          <p:cNvPr id="33" name="Card"/>
+          <p:cNvSpPr/>
+          <p:nvPr/>
+        </p:nvSpPr>
+        <p:spPr>
+          <a:xfrm>
+            <a:off x="9075191" y="4069080"/>
+            <a:ext cx="2567864" cy="2103120"/>
+          </a:xfrm>
+          <a:prstGeom prst="roundRect">
+            <a:avLst>
+              <a:gd name="adj" fmla="val 3478"/>
+            </a:avLst>
+          </a:prstGeom>
+          <a:solidFill>
+            <a:schemeClr val="bg2"/>
+          </a:solidFill>
+          <a:ln w="9525">
+            <a:solidFill>
+              <a:srgbClr val="C4CBD8"/>
+            </a:solidFill>
+            <a:prstDash val="solid"/>
+          </a:ln>
+        </p:spPr>
+      </p:sp>
+      <p:sp>
+        <p:nvSpPr>
+          <p:cNvPr id="34" name="Card label"/>
+          <p:cNvSpPr txBox="1"/>
+          <p:nvPr/>
+        </p:nvSpPr>
+        <p:spPr>
+          <a:xfrm>
+            <a:off x="9258071" y="4197096"/>
+            <a:ext cx="2202104" cy="310896"/>
+          </a:xfrm>
+          <a:prstGeom prst="rect">
+            <a:avLst/>
+          </a:prstGeom>
+          <a:noFill/>
+          <a:ln/>
+        </p:spPr>
+        <p:txBody>
+          <a:bodyPr wrap="square" lIns="0" tIns="0" rIns="0" bIns="0" rtlCol="0" anchor="ctr"/>
+          <a:lstStyle/>
+          <a:p>
+            <a:pPr indent="0" marL="0">
+              <a:buNone/>
+            </a:pPr>
+            <a:r>
+              <a:rPr lang="en-US" sz="1300" b="1" dirty="0">
+                <a:solidFill>
+                  <a:schemeClr val="accent1"/>
+                </a:solidFill>
+              </a:rPr>
+              <a:t>AXIOM Lab 2.14</a:t>
+            </a:r>
+            <a:endParaRPr lang="en-US" sz="1300" dirty="0"/>
+          </a:p>
+        </p:txBody>
+      </p:sp>
+      <p:sp>
+        <p:nvSpPr>
+          <p:cNvPr id="35" name="Card head"/>
+          <p:cNvSpPr txBox="1"/>
+          <p:nvPr/>
+        </p:nvSpPr>
+        <p:spPr>
+          <a:xfrm>
+            <a:off x="9258071" y="4526280"/>
+            <a:ext cx="2202104" cy="1060704"/>
+          </a:xfrm>
+          <a:prstGeom prst="rect">
+            <a:avLst/>
+          </a:prstGeom>
+          <a:noFill/>
+          <a:ln/>
+        </p:spPr>
+        <p:txBody>
+          <a:bodyPr wrap="square" lIns="0" tIns="0" rIns="0" bIns="0" rtlCol="0" anchor="t"/>
+          <a:lstStyle/>
+          <a:p>
+            <a:pPr indent="0" marL="0">
+              <a:buNone/>
+            </a:pPr>
+            <a:r>
+              <a:rPr lang="en-US" sz="1500" b="1" dirty="0">
+                <a:solidFill>
+                  <a:schemeClr val="tx1"/>
+                </a:solidFill>
+                <a:latin typeface="Cambria" pitchFamily="34" charset="0"/>
+                <a:ea typeface="Cambria" pitchFamily="34" charset="-122"/>
+                <a:cs typeface="Cambria" pitchFamily="34" charset="-120"/>
+              </a:rPr>
+              <a:t>Learning a Rule by Trial: Simulators, Exploration, and Guardrails</a:t>
+            </a:r>
+            <a:endParaRPr lang="en-US" sz="1500" dirty="0"/>
+          </a:p>
+        </p:txBody>
+      </p:sp>
+      <p:sp>
+        <p:nvSpPr>
+          <p:cNvPr id="36" name="Card text"/>
+          <p:cNvSpPr txBox="1"/>
+          <p:nvPr/>
+        </p:nvSpPr>
+        <p:spPr>
+          <a:xfrm>
+            <a:off x="9258071" y="5660136"/>
             <a:ext cx="2202104" cy="384048"/>
           </a:xfrm>
           <a:prstGeom prst="rect">
